--- a/docs/design/dist/d01-system-architecture.pptx
+++ b/docs/design/dist/d01-system-architecture.pptx
@@ -3289,7 +3289,7 @@
           <a:p>
             <a:pPr algn="l">
               <a:lnSpc>
-                <a:spcPts val="1320"/>
+                <a:spcPts val="1200"/>
               </a:lnSpc>
             </a:pPr>
             <a:r>
@@ -3357,7 +3357,7 @@
           <a:p>
             <a:pPr algn="r">
               <a:lnSpc>
-                <a:spcPts val="1320"/>
+                <a:spcPts val="1200"/>
               </a:lnSpc>
             </a:pPr>
             <a:r>
@@ -3425,7 +3425,7 @@
           <a:p>
             <a:pPr algn="l">
               <a:lnSpc>
-                <a:spcPts val="1320"/>
+                <a:spcPts val="1200"/>
               </a:lnSpc>
             </a:pPr>
             <a:r>
@@ -19941,7 +19941,7 @@
         <p:spPr>
           <a:xfrm>
             <a:off x="381000" y="6309360"/>
-            <a:ext cx="3352800" cy="396240"/>
+            <a:ext cx="3442335" cy="396240"/>
           </a:xfrm>
           <a:prstGeom prst="roundRect">
             <a:avLst>
@@ -20004,7 +20004,7 @@
       </p:sp>
       <p:cxnSp>
         <p:nvCxnSpPr>
-          <p:cNvPr id="70" name="범례 실선"/>
+          <p:cNvPr id="70" name="범례 실시간 질의"/>
           <p:cNvCxnSpPr/>
           <p:nvPr/>
         </p:nvCxnSpPr>
@@ -20026,14 +20026,14 @@
       </p:cxnSp>
       <p:sp>
         <p:nvSpPr>
-          <p:cNvPr id="71" name="범례 실선 글"/>
+          <p:cNvPr id="71" name="범례 글 실시간 질의"/>
           <p:cNvSpPr txBox="1"/>
           <p:nvPr/>
         </p:nvSpPr>
         <p:spPr>
           <a:xfrm>
             <a:off x="1341120" y="6309360"/>
-            <a:ext cx="762000" cy="396240"/>
+            <a:ext cx="786765" cy="396240"/>
           </a:xfrm>
           <a:prstGeom prst="rect">
             <a:avLst/>
@@ -20063,13 +20063,13 @@
       </p:sp>
       <p:cxnSp>
         <p:nvCxnSpPr>
-          <p:cNvPr id="72" name="범례 점선"/>
+          <p:cNvPr id="72" name="범례 비동기 데이터 흐름"/>
           <p:cNvCxnSpPr/>
           <p:nvPr/>
         </p:nvCxnSpPr>
         <p:spPr>
           <a:xfrm>
-            <a:off x="2179320" y="6507480"/>
+            <a:off x="2204085" y="6507480"/>
             <a:ext cx="350520" cy="0"/>
           </a:xfrm>
           <a:prstGeom prst="line">
@@ -20086,14 +20086,14 @@
       </p:cxnSp>
       <p:sp>
         <p:nvSpPr>
-          <p:cNvPr id="73" name="범례 점선 글"/>
+          <p:cNvPr id="73" name="범례 글 비동기 데이터 흐름"/>
           <p:cNvSpPr txBox="1"/>
           <p:nvPr/>
         </p:nvSpPr>
         <p:spPr>
           <a:xfrm>
-            <a:off x="2606040" y="6309360"/>
-            <a:ext cx="1066800" cy="396240"/>
+            <a:off x="2630805" y="6309360"/>
+            <a:ext cx="1192530" cy="396240"/>
           </a:xfrm>
           <a:prstGeom prst="rect">
             <a:avLst/>

--- a/docs/design/dist/d01-system-architecture.pptx
+++ b/docs/design/dist/d01-system-architecture.pptx
@@ -3104,8 +3104,8 @@
         </p:nvSpPr>
         <p:spPr>
           <a:xfrm>
-            <a:off x="381000" y="289560"/>
-            <a:ext cx="53340" cy="335280"/>
+            <a:off x="381000" y="274320"/>
+            <a:ext cx="53340" cy="548640"/>
           </a:xfrm>
           <a:prstGeom prst="roundRect">
             <a:avLst>
@@ -3113,7 +3113,7 @@
             </a:avLst>
           </a:prstGeom>
           <a:solidFill>
-            <a:srgbClr val="164B8C"/>
+            <a:srgbClr val="1F4E8C"/>
           </a:solidFill>
           <a:ln>
             <a:noFill/>
@@ -3135,8 +3135,8 @@
         </p:nvSpPr>
         <p:spPr>
           <a:xfrm>
-            <a:off x="533400" y="289560"/>
-            <a:ext cx="7620000" cy="304800"/>
+            <a:off x="533400" y="228600"/>
+            <a:ext cx="8001000" cy="365760"/>
           </a:xfrm>
           <a:prstGeom prst="rect">
             <a:avLst/>
@@ -3151,9 +3151,9 @@
           <a:p>
             <a:pPr algn="l"/>
             <a:r>
-              <a:rPr sz="1800" b="1">
+              <a:rPr sz="2160" b="1">
                 <a:solidFill>
-                  <a:srgbClr val="0A2342"/>
+                  <a:srgbClr val="0B2545"/>
                 </a:solidFill>
                 <a:latin typeface="Pretendard"/>
                 <a:ea typeface="Pretendard"/>
@@ -3172,8 +3172,8 @@
         </p:nvSpPr>
         <p:spPr>
           <a:xfrm>
-            <a:off x="533400" y="624840"/>
-            <a:ext cx="7620000" cy="167640"/>
+            <a:off x="533400" y="640080"/>
+            <a:ext cx="9144000" cy="182880"/>
           </a:xfrm>
           <a:prstGeom prst="rect">
             <a:avLst/>
@@ -3188,7 +3188,7 @@
           <a:p>
             <a:pPr algn="l"/>
             <a:r>
-              <a:rPr sz="960" b="0">
+              <a:rPr sz="1080" b="0">
                 <a:solidFill>
                   <a:srgbClr val="3F4E61"/>
                 </a:solidFill>
@@ -3209,8 +3209,8 @@
         </p:nvSpPr>
         <p:spPr>
           <a:xfrm>
-            <a:off x="8763000" y="426720"/>
-            <a:ext cx="3048000" cy="152400"/>
+            <a:off x="8382000" y="411480"/>
+            <a:ext cx="3429000" cy="167640"/>
           </a:xfrm>
           <a:prstGeom prst="rect">
             <a:avLst/>
@@ -3225,7 +3225,7 @@
           <a:p>
             <a:pPr algn="r"/>
             <a:r>
-              <a:rPr sz="840" b="0">
+              <a:rPr sz="1019" b="0">
                 <a:solidFill>
                   <a:srgbClr val="3F4E61"/>
                 </a:solidFill>
@@ -3233,7 +3233,7 @@
                 <a:ea typeface="Pretendard"/>
                 <a:cs typeface="Pretendard"/>
               </a:rPr>
-              <a:t>KDMS-D01 · v0.2 · 2026-10-06</a:t>
+              <a:t>KDMS-D01 · v0.3 · 2026-10-09</a:t>
             </a:r>
           </a:p>
         </p:txBody>
@@ -3255,11 +3255,11 @@
             </a:avLst>
           </a:prstGeom>
           <a:solidFill>
-            <a:srgbClr val="F1F6FC"/>
+            <a:srgbClr val="EEF6FD"/>
           </a:solidFill>
           <a:ln w="10668">
             <a:solidFill>
-              <a:srgbClr val="A9C3E2"/>
+              <a:srgbClr val="8EC3EC"/>
             </a:solidFill>
           </a:ln>
         </p:spPr>
@@ -3277,7 +3277,7 @@
             <a:r>
               <a:rPr sz="1200" b="1">
                 <a:solidFill>
-                  <a:srgbClr val="0A2342"/>
+                  <a:srgbClr val="0B2545"/>
                 </a:solidFill>
                 <a:latin typeface="Pretendard"/>
                 <a:ea typeface="Pretendard"/>
@@ -3289,11 +3289,11 @@
           <a:p>
             <a:pPr algn="l">
               <a:lnSpc>
-                <a:spcPts val="1200"/>
+                <a:spcPts val="1320"/>
               </a:lnSpc>
             </a:pPr>
             <a:r>
-              <a:rPr sz="869" b="0">
+              <a:rPr sz="1019" b="0">
                 <a:solidFill>
                   <a:srgbClr val="3F4E61"/>
                 </a:solidFill>
@@ -3323,11 +3323,11 @@
             </a:avLst>
           </a:prstGeom>
           <a:solidFill>
-            <a:srgbClr val="E8F1FB"/>
+            <a:srgbClr val="EEF6FD"/>
           </a:solidFill>
           <a:ln w="15240">
             <a:solidFill>
-              <a:srgbClr val="164B8C"/>
+              <a:srgbClr val="1F4E8C"/>
             </a:solidFill>
           </a:ln>
         </p:spPr>
@@ -3345,7 +3345,7 @@
             <a:r>
               <a:rPr sz="1200" b="1">
                 <a:solidFill>
-                  <a:srgbClr val="0A2342"/>
+                  <a:srgbClr val="0B2545"/>
                 </a:solidFill>
                 <a:latin typeface="Pretendard"/>
                 <a:ea typeface="Pretendard"/>
@@ -3357,11 +3357,11 @@
           <a:p>
             <a:pPr algn="r">
               <a:lnSpc>
-                <a:spcPts val="1200"/>
+                <a:spcPts val="1320"/>
               </a:lnSpc>
             </a:pPr>
             <a:r>
-              <a:rPr sz="869" b="0">
+              <a:rPr sz="1019" b="0">
                 <a:solidFill>
                   <a:srgbClr val="3F4E61"/>
                 </a:solidFill>
@@ -3391,11 +3391,11 @@
             </a:avLst>
           </a:prstGeom>
           <a:solidFill>
-            <a:srgbClr val="F1F6FC"/>
+            <a:srgbClr val="EEF6FD"/>
           </a:solidFill>
           <a:ln w="10668">
             <a:solidFill>
-              <a:srgbClr val="A9C3E2"/>
+              <a:srgbClr val="8EC3EC"/>
             </a:solidFill>
           </a:ln>
         </p:spPr>
@@ -3413,7 +3413,7 @@
             <a:r>
               <a:rPr sz="1200" b="1">
                 <a:solidFill>
-                  <a:srgbClr val="0A2342"/>
+                  <a:srgbClr val="0B2545"/>
                 </a:solidFill>
                 <a:latin typeface="Pretendard"/>
                 <a:ea typeface="Pretendard"/>
@@ -3425,11 +3425,11 @@
           <a:p>
             <a:pPr algn="l">
               <a:lnSpc>
-                <a:spcPts val="1200"/>
+                <a:spcPts val="1320"/>
               </a:lnSpc>
             </a:pPr>
             <a:r>
-              <a:rPr sz="869" b="0">
+              <a:rPr sz="1019" b="0">
                 <a:solidFill>
                   <a:srgbClr val="3F4E61"/>
                 </a:solidFill>
@@ -3450,8 +3450,8 @@
         </p:nvSpPr>
         <p:spPr>
           <a:xfrm>
-            <a:off x="3429000" y="822960"/>
-            <a:ext cx="3299460" cy="365760"/>
+            <a:off x="3429000" y="929640"/>
+            <a:ext cx="3299460" cy="350520"/>
           </a:xfrm>
           <a:prstGeom prst="roundRect">
             <a:avLst>
@@ -3463,21 +3463,21 @@
           </a:solidFill>
           <a:ln w="15240">
             <a:solidFill>
-              <a:srgbClr val="164B8C"/>
+              <a:srgbClr val="1F4E8C"/>
             </a:solidFill>
           </a:ln>
         </p:spPr>
         <p:txBody>
-          <a:bodyPr rtlCol="0" anchor="ctr" lIns="925449" tIns="0" rIns="0" bIns="0" wrap="none">
+          <a:bodyPr rtlCol="0" anchor="ctr" lIns="874776" tIns="0" rIns="0" bIns="0" wrap="none">
             <a:noAutofit/>
           </a:bodyPr>
           <a:lstStyle/>
           <a:p>
             <a:pPr algn="l"/>
             <a:r>
-              <a:rPr sz="1019" b="1">
+              <a:rPr sz="1080" b="1">
                 <a:solidFill>
-                  <a:srgbClr val="0A2342"/>
+                  <a:srgbClr val="0B2545"/>
                 </a:solidFill>
                 <a:latin typeface="Pretendard"/>
                 <a:ea typeface="Pretendard"/>
@@ -3496,7 +3496,7 @@
         </p:nvSpPr>
         <p:spPr>
           <a:xfrm>
-            <a:off x="4113149" y="943721"/>
+            <a:off x="4062476" y="1042781"/>
             <a:ext cx="132080" cy="128159"/>
           </a:xfrm>
           <a:custGeom>
@@ -3598,7 +3598,7 @@
                   <a:pt x="51835" y="2950"/>
                 </a:lnTo>
                 <a:lnTo>
-                  <a:pt x="53658" y="2167"/>
+                  <a:pt x="53657" y="2167"/>
                 </a:lnTo>
                 <a:lnTo>
                   <a:pt x="55549" y="1505"/>
@@ -3634,7 +3634,7 @@
                   <a:pt x="76531" y="1505"/>
                 </a:lnTo>
                 <a:lnTo>
-                  <a:pt x="78423" y="2167"/>
+                  <a:pt x="78422" y="2167"/>
                 </a:lnTo>
                 <a:lnTo>
                   <a:pt x="80245" y="2950"/>
@@ -3652,7 +3652,7 @@
                   <a:pt x="86849" y="7283"/>
                 </a:lnTo>
                 <a:lnTo>
-                  <a:pt x="88329" y="8668"/>
+                  <a:pt x="88328" y="8668"/>
                 </a:lnTo>
                 <a:lnTo>
                   <a:pt x="89713" y="10147"/>
@@ -3724,7 +3724,7 @@
                   <a:pt x="89713" y="51766"/>
                 </a:lnTo>
                 <a:lnTo>
-                  <a:pt x="88329" y="53245"/>
+                  <a:pt x="88328" y="53245"/>
                 </a:lnTo>
                 <a:lnTo>
                   <a:pt x="86849" y="54629"/>
@@ -3742,7 +3742,7 @@
                   <a:pt x="80245" y="58963"/>
                 </a:lnTo>
                 <a:lnTo>
-                  <a:pt x="78423" y="59746"/>
+                  <a:pt x="78422" y="59746"/>
                 </a:lnTo>
                 <a:lnTo>
                   <a:pt x="76531" y="60408"/>
@@ -3778,7 +3778,7 @@
                   <a:pt x="55549" y="60408"/>
                 </a:lnTo>
                 <a:lnTo>
-                  <a:pt x="53658" y="59746"/>
+                  <a:pt x="53657" y="59746"/>
                 </a:lnTo>
                 <a:lnTo>
                   <a:pt x="51835" y="58963"/>
@@ -4101,7 +4101,7 @@
                 </a:lnTo>
                 <a:close/>
                 <a:moveTo>
-                  <a:pt x="12383" y="115777"/>
+                  <a:pt x="12382" y="115777"/>
                 </a:moveTo>
                 <a:lnTo>
                   <a:pt x="119697" y="115777"/>
@@ -4299,7 +4299,7 @@
                   <a:pt x="37444" y="90695"/>
                 </a:lnTo>
                 <a:lnTo>
-                  <a:pt x="35497" y="91287"/>
+                  <a:pt x="35496" y="91287"/>
                 </a:lnTo>
                 <a:lnTo>
                   <a:pt x="33523" y="91934"/>
@@ -4323,7 +4323,7 @@
                   <a:pt x="21141" y="96990"/>
                 </a:lnTo>
                 <a:lnTo>
-                  <a:pt x="18987" y="98028"/>
+                  <a:pt x="18986" y="98028"/>
                 </a:lnTo>
                 <a:lnTo>
                   <a:pt x="18512" y="98280"/>
@@ -4395,10 +4395,10 @@
                   <a:pt x="12395" y="108212"/>
                 </a:lnTo>
                 <a:lnTo>
-                  <a:pt x="12383" y="108760"/>
-                </a:lnTo>
-                <a:lnTo>
-                  <a:pt x="12383" y="115777"/>
+                  <a:pt x="12382" y="108760"/>
+                </a:lnTo>
+                <a:lnTo>
+                  <a:pt x="12382" y="115777"/>
                 </a:lnTo>
                 <a:close/>
                 <a:moveTo>
@@ -4697,7 +4697,7 @@
             </a:pathLst>
           </a:custGeom>
           <a:solidFill>
-            <a:srgbClr val="164B8C"/>
+            <a:srgbClr val="1F4E8C"/>
           </a:solidFill>
           <a:ln>
             <a:noFill/>
@@ -4730,27 +4730,27 @@
           <a:solidFill>
             <a:srgbClr val="FFFFFF"/>
           </a:solidFill>
-          <a:ln w="12192">
+          <a:ln w="13716">
             <a:solidFill>
-              <a:srgbClr val="6F9BD1"/>
+              <a:srgbClr val="8EC3EC"/>
             </a:solidFill>
           </a:ln>
         </p:spPr>
         <p:txBody>
-          <a:bodyPr rtlCol="0" anchor="t" lIns="45720" tIns="377190" rIns="45720" bIns="0" wrap="none">
+          <a:bodyPr rtlCol="0" anchor="t" lIns="45720" tIns="358140" rIns="45720" bIns="0" wrap="none">
             <a:noAutofit/>
           </a:bodyPr>
           <a:lstStyle/>
           <a:p>
             <a:pPr algn="ctr">
               <a:lnSpc>
-                <a:spcPts val="1439"/>
+                <a:spcPts val="1560"/>
               </a:lnSpc>
             </a:pPr>
             <a:r>
-              <a:rPr sz="1140" b="1">
+              <a:rPr sz="1200" b="1">
                 <a:solidFill>
-                  <a:srgbClr val="0A2342"/>
+                  <a:srgbClr val="0B2545"/>
                 </a:solidFill>
                 <a:latin typeface="Pretendard"/>
                 <a:ea typeface="Pretendard"/>
@@ -4762,11 +4762,11 @@
           <a:p>
             <a:pPr algn="ctr">
               <a:lnSpc>
-                <a:spcPts val="1140"/>
+                <a:spcPts val="1320"/>
               </a:lnSpc>
             </a:pPr>
             <a:r>
-              <a:rPr sz="869" b="0">
+              <a:rPr sz="1019" b="0">
                 <a:solidFill>
                   <a:srgbClr val="3F4E61"/>
                 </a:solidFill>
@@ -4787,7 +4787,7 @@
         </p:nvSpPr>
         <p:spPr>
           <a:xfrm>
-            <a:off x="3934460" y="1967230"/>
+            <a:off x="3934460" y="1948180"/>
             <a:ext cx="254000" cy="203200"/>
           </a:xfrm>
           <a:custGeom>
@@ -5154,7 +5154,7 @@
             </a:pathLst>
           </a:custGeom>
           <a:solidFill>
-            <a:srgbClr val="164B8C"/>
+            <a:srgbClr val="1F4E8C"/>
           </a:solidFill>
           <a:ln>
             <a:noFill/>
@@ -5187,27 +5187,27 @@
           <a:solidFill>
             <a:srgbClr val="FFFFFF"/>
           </a:solidFill>
-          <a:ln w="12192">
+          <a:ln w="13716">
             <a:solidFill>
-              <a:srgbClr val="6F9BD1"/>
+              <a:srgbClr val="8EC3EC"/>
             </a:solidFill>
           </a:ln>
         </p:spPr>
         <p:txBody>
-          <a:bodyPr rtlCol="0" anchor="t" lIns="45720" tIns="377190" rIns="45720" bIns="0" wrap="none">
+          <a:bodyPr rtlCol="0" anchor="t" lIns="45720" tIns="358140" rIns="45720" bIns="0" wrap="none">
             <a:noAutofit/>
           </a:bodyPr>
           <a:lstStyle/>
           <a:p>
             <a:pPr algn="ctr">
               <a:lnSpc>
-                <a:spcPts val="1439"/>
+                <a:spcPts val="1560"/>
               </a:lnSpc>
             </a:pPr>
             <a:r>
-              <a:rPr sz="1140" b="1">
+              <a:rPr sz="1200" b="1">
                 <a:solidFill>
-                  <a:srgbClr val="0A2342"/>
+                  <a:srgbClr val="0B2545"/>
                 </a:solidFill>
                 <a:latin typeface="Pretendard"/>
                 <a:ea typeface="Pretendard"/>
@@ -5219,11 +5219,11 @@
           <a:p>
             <a:pPr algn="ctr">
               <a:lnSpc>
-                <a:spcPts val="1140"/>
+                <a:spcPts val="1320"/>
               </a:lnSpc>
             </a:pPr>
             <a:r>
-              <a:rPr sz="869" b="0">
+              <a:rPr sz="1019" b="0">
                 <a:solidFill>
                   <a:srgbClr val="3F4E61"/>
                 </a:solidFill>
@@ -5231,7 +5231,7 @@
                 <a:ea typeface="Pretendard"/>
                 <a:cs typeface="Pretendard"/>
               </a:rPr>
-              <a:t>plan · load · sync · cutover</a:t>
+              <a:t>load · sync · cutover 등</a:t>
             </a:r>
           </a:p>
         </p:txBody>
@@ -5244,7 +5244,7 @@
         </p:nvSpPr>
         <p:spPr>
           <a:xfrm>
-            <a:off x="5969000" y="1967230"/>
+            <a:off x="5969000" y="1948180"/>
             <a:ext cx="254000" cy="203200"/>
           </a:xfrm>
           <a:custGeom>
@@ -5617,7 +5617,7 @@
             </a:pathLst>
           </a:custGeom>
           <a:solidFill>
-            <a:srgbClr val="164B8C"/>
+            <a:srgbClr val="1F4E8C"/>
           </a:solidFill>
           <a:ln>
             <a:noFill/>
@@ -5650,27 +5650,27 @@
           <a:solidFill>
             <a:srgbClr val="FFFFFF"/>
           </a:solidFill>
-          <a:ln w="12192">
+          <a:ln w="13716">
             <a:solidFill>
-              <a:srgbClr val="6F9BD1"/>
+              <a:srgbClr val="8EC3EC"/>
             </a:solidFill>
           </a:ln>
         </p:spPr>
         <p:txBody>
-          <a:bodyPr rtlCol="0" anchor="t" lIns="45720" tIns="377190" rIns="45720" bIns="0" wrap="none">
+          <a:bodyPr rtlCol="0" anchor="t" lIns="45720" tIns="358140" rIns="45720" bIns="0" wrap="none">
             <a:noAutofit/>
           </a:bodyPr>
           <a:lstStyle/>
           <a:p>
             <a:pPr algn="ctr">
               <a:lnSpc>
-                <a:spcPts val="1439"/>
+                <a:spcPts val="1560"/>
               </a:lnSpc>
             </a:pPr>
             <a:r>
-              <a:rPr sz="1140" b="1">
+              <a:rPr sz="1200" b="1">
                 <a:solidFill>
-                  <a:srgbClr val="0A2342"/>
+                  <a:srgbClr val="0B2545"/>
                 </a:solidFill>
                 <a:latin typeface="Pretendard"/>
                 <a:ea typeface="Pretendard"/>
@@ -5682,11 +5682,11 @@
           <a:p>
             <a:pPr algn="ctr">
               <a:lnSpc>
-                <a:spcPts val="1140"/>
+                <a:spcPts val="1320"/>
               </a:lnSpc>
             </a:pPr>
             <a:r>
-              <a:rPr sz="869" b="0">
+              <a:rPr sz="1019" b="0">
                 <a:solidFill>
                   <a:srgbClr val="3F4E61"/>
                 </a:solidFill>
@@ -5694,7 +5694,7 @@
                 <a:ea typeface="Pretendard"/>
                 <a:cs typeface="Pretendard"/>
               </a:rPr>
-              <a:t>kdms.yml · kdms-rules.yml</a:t>
+              <a:t>kdms.yml · 규칙 파일</a:t>
             </a:r>
           </a:p>
         </p:txBody>
@@ -5707,7 +5707,7 @@
         </p:nvSpPr>
         <p:spPr>
           <a:xfrm>
-            <a:off x="8018780" y="1967230"/>
+            <a:off x="8018780" y="1948180"/>
             <a:ext cx="249555" cy="241300"/>
           </a:xfrm>
           <a:custGeom>
@@ -6378,7 +6378,7 @@
                   <a:pt x="141605" y="138748"/>
                 </a:lnTo>
                 <a:lnTo>
-                  <a:pt x="154940" y="145098"/>
+                  <a:pt x="154940" y="145097"/>
                 </a:lnTo>
                 <a:lnTo>
                   <a:pt x="155646" y="144462"/>
@@ -6393,10 +6393,10 @@
                   <a:pt x="157974" y="142558"/>
                 </a:lnTo>
                 <a:lnTo>
-                  <a:pt x="158821" y="141922"/>
-                </a:lnTo>
-                <a:lnTo>
-                  <a:pt x="159703" y="141288"/>
+                  <a:pt x="158821" y="141923"/>
+                </a:lnTo>
+                <a:lnTo>
+                  <a:pt x="159703" y="141287"/>
                 </a:lnTo>
                 <a:lnTo>
                   <a:pt x="160620" y="140652"/>
@@ -6411,10 +6411,10 @@
                   <a:pt x="163583" y="138748"/>
                 </a:lnTo>
                 <a:lnTo>
-                  <a:pt x="164641" y="138112"/>
-                </a:lnTo>
-                <a:lnTo>
-                  <a:pt x="165735" y="137478"/>
+                  <a:pt x="164641" y="138113"/>
+                </a:lnTo>
+                <a:lnTo>
+                  <a:pt x="165735" y="137477"/>
                 </a:lnTo>
                 <a:lnTo>
                   <a:pt x="166844" y="136856"/>
@@ -6495,10 +6495,10 @@
                   <a:pt x="213203" y="136856"/>
                 </a:lnTo>
                 <a:lnTo>
-                  <a:pt x="214312" y="137478"/>
-                </a:lnTo>
-                <a:lnTo>
-                  <a:pt x="215406" y="138112"/>
+                  <a:pt x="214312" y="137477"/>
+                </a:lnTo>
+                <a:lnTo>
+                  <a:pt x="215406" y="138113"/>
                 </a:lnTo>
                 <a:lnTo>
                   <a:pt x="216464" y="138748"/>
@@ -6513,10 +6513,10 @@
                   <a:pt x="219428" y="140652"/>
                 </a:lnTo>
                 <a:lnTo>
-                  <a:pt x="220345" y="141288"/>
-                </a:lnTo>
-                <a:lnTo>
-                  <a:pt x="221227" y="141922"/>
+                  <a:pt x="220345" y="141287"/>
+                </a:lnTo>
+                <a:lnTo>
+                  <a:pt x="221227" y="141923"/>
                 </a:lnTo>
                 <a:lnTo>
                   <a:pt x="222074" y="142558"/>
@@ -6531,7 +6531,7 @@
                   <a:pt x="224402" y="144462"/>
                 </a:lnTo>
                 <a:lnTo>
-                  <a:pt x="225108" y="145098"/>
+                  <a:pt x="225108" y="145097"/>
                 </a:lnTo>
                 <a:lnTo>
                   <a:pt x="238442" y="138748"/>
@@ -6998,7 +6998,7 @@
             </a:pathLst>
           </a:custGeom>
           <a:solidFill>
-            <a:srgbClr val="164B8C"/>
+            <a:srgbClr val="1F4E8C"/>
           </a:solidFill>
           <a:ln>
             <a:noFill/>
@@ -7031,27 +7031,27 @@
           <a:solidFill>
             <a:srgbClr val="FFFFFF"/>
           </a:solidFill>
-          <a:ln w="12192">
+          <a:ln w="13716">
             <a:solidFill>
-              <a:srgbClr val="6F9BD1"/>
+              <a:srgbClr val="8EC3EC"/>
             </a:solidFill>
           </a:ln>
         </p:spPr>
         <p:txBody>
-          <a:bodyPr rtlCol="0" anchor="t" lIns="45720" tIns="461010" rIns="45720" bIns="0" wrap="none">
+          <a:bodyPr rtlCol="0" anchor="t" lIns="45720" tIns="441960" rIns="45720" bIns="0" wrap="none">
             <a:noAutofit/>
           </a:bodyPr>
           <a:lstStyle/>
           <a:p>
             <a:pPr algn="ctr">
               <a:lnSpc>
-                <a:spcPts val="1439"/>
+                <a:spcPts val="1560"/>
               </a:lnSpc>
             </a:pPr>
             <a:r>
-              <a:rPr sz="1140" b="1">
+              <a:rPr sz="1200" b="1">
                 <a:solidFill>
-                  <a:srgbClr val="0A2342"/>
+                  <a:srgbClr val="0B2545"/>
                 </a:solidFill>
                 <a:latin typeface="Pretendard"/>
                 <a:ea typeface="Pretendard"/>
@@ -7063,11 +7063,11 @@
           <a:p>
             <a:pPr algn="ctr">
               <a:lnSpc>
-                <a:spcPts val="1140"/>
+                <a:spcPts val="1320"/>
               </a:lnSpc>
             </a:pPr>
             <a:r>
-              <a:rPr sz="869" b="0">
+              <a:rPr sz="1019" b="0">
                 <a:solidFill>
                   <a:srgbClr val="3F4E61"/>
                 </a:solidFill>
@@ -7088,7 +7088,7 @@
         </p:nvSpPr>
         <p:spPr>
           <a:xfrm>
-            <a:off x="4394200" y="2881630"/>
+            <a:off x="4394200" y="2862580"/>
             <a:ext cx="215900" cy="279400"/>
           </a:xfrm>
           <a:custGeom>
@@ -7255,7 +7255,7 @@
             </a:pathLst>
           </a:custGeom>
           <a:solidFill>
-            <a:srgbClr val="164B8C"/>
+            <a:srgbClr val="1F4E8C"/>
           </a:solidFill>
           <a:ln>
             <a:noFill/>
@@ -7278,13 +7278,13 @@
         <p:spPr>
           <a:xfrm>
             <a:off x="3177540" y="2811780"/>
-            <a:ext cx="198120" cy="198120"/>
+            <a:ext cx="213360" cy="213360"/>
           </a:xfrm>
           <a:prstGeom prst="ellipse">
             <a:avLst/>
           </a:prstGeom>
           <a:solidFill>
-            <a:srgbClr val="164B8C"/>
+            <a:srgbClr val="1F4E8C"/>
           </a:solidFill>
           <a:ln>
             <a:noFill/>
@@ -7298,7 +7298,7 @@
           <a:p>
             <a:pPr algn="ctr"/>
             <a:r>
-              <a:rPr sz="900" b="1">
+              <a:rPr sz="1019" b="1">
                 <a:solidFill>
                   <a:srgbClr val="FFFFFF"/>
                 </a:solidFill>
@@ -7330,27 +7330,27 @@
           <a:solidFill>
             <a:srgbClr val="FFFFFF"/>
           </a:solidFill>
-          <a:ln w="12192">
+          <a:ln w="13716">
             <a:solidFill>
-              <a:srgbClr val="6F9BD1"/>
+              <a:srgbClr val="8EC3EC"/>
             </a:solidFill>
           </a:ln>
         </p:spPr>
         <p:txBody>
-          <a:bodyPr rtlCol="0" anchor="t" lIns="45720" tIns="461010" rIns="45720" bIns="0" wrap="none">
+          <a:bodyPr rtlCol="0" anchor="t" lIns="45720" tIns="441960" rIns="45720" bIns="0" wrap="none">
             <a:noAutofit/>
           </a:bodyPr>
           <a:lstStyle/>
           <a:p>
             <a:pPr algn="ctr">
               <a:lnSpc>
-                <a:spcPts val="1439"/>
+                <a:spcPts val="1560"/>
               </a:lnSpc>
             </a:pPr>
             <a:r>
-              <a:rPr sz="1140" b="1">
+              <a:rPr sz="1200" b="1">
                 <a:solidFill>
-                  <a:srgbClr val="0A2342"/>
+                  <a:srgbClr val="0B2545"/>
                 </a:solidFill>
                 <a:latin typeface="Pretendard"/>
                 <a:ea typeface="Pretendard"/>
@@ -7362,11 +7362,11 @@
           <a:p>
             <a:pPr algn="ctr">
               <a:lnSpc>
-                <a:spcPts val="1140"/>
+                <a:spcPts val="1320"/>
               </a:lnSpc>
             </a:pPr>
             <a:r>
-              <a:rPr sz="869" b="0">
+              <a:rPr sz="1019" b="0">
                 <a:solidFill>
                   <a:srgbClr val="3F4E61"/>
                 </a:solidFill>
@@ -7387,7 +7387,7 @@
         </p:nvSpPr>
         <p:spPr>
           <a:xfrm>
-            <a:off x="7581900" y="2907030"/>
+            <a:off x="7581900" y="2887980"/>
             <a:ext cx="254000" cy="254000"/>
           </a:xfrm>
           <a:custGeom>
@@ -9643,7 +9643,7 @@
             </a:pathLst>
           </a:custGeom>
           <a:solidFill>
-            <a:srgbClr val="164B8C"/>
+            <a:srgbClr val="1F4E8C"/>
           </a:solidFill>
           <a:ln>
             <a:noFill/>
@@ -9666,13 +9666,13 @@
         <p:spPr>
           <a:xfrm>
             <a:off x="6377940" y="2811780"/>
-            <a:ext cx="198120" cy="198120"/>
+            <a:ext cx="213360" cy="213360"/>
           </a:xfrm>
           <a:prstGeom prst="ellipse">
             <a:avLst/>
           </a:prstGeom>
           <a:solidFill>
-            <a:srgbClr val="164B8C"/>
+            <a:srgbClr val="1F4E8C"/>
           </a:solidFill>
           <a:ln>
             <a:noFill/>
@@ -9686,7 +9686,7 @@
           <a:p>
             <a:pPr algn="ctr"/>
             <a:r>
-              <a:rPr sz="900" b="1">
+              <a:rPr sz="1019" b="1">
                 <a:solidFill>
                   <a:srgbClr val="FFFFFF"/>
                 </a:solidFill>
@@ -9716,29 +9716,29 @@
             </a:avLst>
           </a:prstGeom>
           <a:solidFill>
-            <a:srgbClr val="D3E5F8"/>
+            <a:srgbClr val="0B2545"/>
           </a:solidFill>
           <a:ln w="18288">
             <a:solidFill>
-              <a:srgbClr val="0F3C78"/>
+              <a:srgbClr val="0B2545"/>
             </a:solidFill>
           </a:ln>
         </p:spPr>
         <p:txBody>
-          <a:bodyPr rtlCol="0" anchor="t" lIns="45720" tIns="461010" rIns="45720" bIns="0" wrap="none">
+          <a:bodyPr rtlCol="0" anchor="t" lIns="45720" tIns="441960" rIns="45720" bIns="0" wrap="none">
             <a:noAutofit/>
           </a:bodyPr>
           <a:lstStyle/>
           <a:p>
             <a:pPr algn="ctr">
               <a:lnSpc>
-                <a:spcPts val="1439"/>
+                <a:spcPts val="1560"/>
               </a:lnSpc>
             </a:pPr>
             <a:r>
-              <a:rPr sz="1140" b="1">
+              <a:rPr sz="1200" b="1">
                 <a:solidFill>
-                  <a:srgbClr val="0A2342"/>
+                  <a:srgbClr val="FFFFFF"/>
                 </a:solidFill>
                 <a:latin typeface="Pretendard"/>
                 <a:ea typeface="Pretendard"/>
@@ -9750,13 +9750,13 @@
           <a:p>
             <a:pPr algn="ctr">
               <a:lnSpc>
-                <a:spcPts val="1140"/>
+                <a:spcPts val="1320"/>
               </a:lnSpc>
             </a:pPr>
             <a:r>
-              <a:rPr sz="869" b="0">
+              <a:rPr sz="1019" b="0">
                 <a:solidFill>
-                  <a:srgbClr val="3F4E61"/>
+                  <a:srgbClr val="FFFFFF"/>
                 </a:solidFill>
                 <a:latin typeface="Pretendard"/>
                 <a:ea typeface="Pretendard"/>
@@ -9775,7 +9775,7 @@
         </p:nvSpPr>
         <p:spPr>
           <a:xfrm>
-            <a:off x="3883660" y="3956050"/>
+            <a:off x="3883660" y="3937000"/>
             <a:ext cx="203200" cy="203200"/>
           </a:xfrm>
           <a:custGeom>
@@ -10428,7 +10428,7 @@
             </a:pathLst>
           </a:custGeom>
           <a:solidFill>
-            <a:srgbClr val="164B8C"/>
+            <a:srgbClr val="FFFFFF"/>
           </a:solidFill>
           <a:ln>
             <a:noFill/>
@@ -10451,13 +10451,13 @@
         <p:spPr>
           <a:xfrm>
             <a:off x="3177540" y="3848100"/>
-            <a:ext cx="198120" cy="198120"/>
+            <a:ext cx="213360" cy="213360"/>
           </a:xfrm>
           <a:prstGeom prst="ellipse">
             <a:avLst/>
           </a:prstGeom>
           <a:solidFill>
-            <a:srgbClr val="164B8C"/>
+            <a:srgbClr val="FFFFFF"/>
           </a:solidFill>
           <a:ln>
             <a:noFill/>
@@ -10471,9 +10471,9 @@
           <a:p>
             <a:pPr algn="ctr"/>
             <a:r>
-              <a:rPr sz="900" b="1">
+              <a:rPr sz="1019" b="1">
                 <a:solidFill>
-                  <a:srgbClr val="FFFFFF"/>
+                  <a:srgbClr val="0B2545"/>
                 </a:solidFill>
                 <a:latin typeface="Pretendard"/>
                 <a:ea typeface="Pretendard"/>
@@ -10503,27 +10503,27 @@
           <a:solidFill>
             <a:srgbClr val="FFFFFF"/>
           </a:solidFill>
-          <a:ln w="12192">
+          <a:ln w="13716">
             <a:solidFill>
-              <a:srgbClr val="6F9BD1"/>
+              <a:srgbClr val="8EC3EC"/>
             </a:solidFill>
           </a:ln>
         </p:spPr>
         <p:txBody>
-          <a:bodyPr rtlCol="0" anchor="t" lIns="45720" tIns="461010" rIns="45720" bIns="0" wrap="none">
+          <a:bodyPr rtlCol="0" anchor="t" lIns="45720" tIns="441960" rIns="45720" bIns="0" wrap="none">
             <a:noAutofit/>
           </a:bodyPr>
           <a:lstStyle/>
           <a:p>
             <a:pPr algn="ctr">
               <a:lnSpc>
-                <a:spcPts val="1439"/>
+                <a:spcPts val="1560"/>
               </a:lnSpc>
             </a:pPr>
             <a:r>
-              <a:rPr sz="1140" b="1">
+              <a:rPr sz="1200" b="1">
                 <a:solidFill>
-                  <a:srgbClr val="0A2342"/>
+                  <a:srgbClr val="0B2545"/>
                 </a:solidFill>
                 <a:latin typeface="Pretendard"/>
                 <a:ea typeface="Pretendard"/>
@@ -10535,11 +10535,11 @@
           <a:p>
             <a:pPr algn="ctr">
               <a:lnSpc>
-                <a:spcPts val="1140"/>
+                <a:spcPts val="1320"/>
               </a:lnSpc>
             </a:pPr>
             <a:r>
-              <a:rPr sz="869" b="0">
+              <a:rPr sz="1019" b="0">
                 <a:solidFill>
                   <a:srgbClr val="3F4E61"/>
                 </a:solidFill>
@@ -10560,7 +10560,7 @@
         </p:nvSpPr>
         <p:spPr>
           <a:xfrm>
-            <a:off x="5980748" y="3930650"/>
+            <a:off x="5980748" y="3911600"/>
             <a:ext cx="230504" cy="254000"/>
           </a:xfrm>
           <a:custGeom>
@@ -11645,7 +11645,7 @@
             </a:pathLst>
           </a:custGeom>
           <a:solidFill>
-            <a:srgbClr val="164B8C"/>
+            <a:srgbClr val="1F4E8C"/>
           </a:solidFill>
           <a:ln>
             <a:noFill/>
@@ -11676,29 +11676,29 @@
             </a:avLst>
           </a:prstGeom>
           <a:solidFill>
-            <a:srgbClr val="D3E5F8"/>
+            <a:srgbClr val="0B2545"/>
           </a:solidFill>
           <a:ln w="18288">
             <a:solidFill>
-              <a:srgbClr val="0F3C78"/>
+              <a:srgbClr val="0B2545"/>
             </a:solidFill>
           </a:ln>
         </p:spPr>
         <p:txBody>
-          <a:bodyPr rtlCol="0" anchor="t" lIns="45720" tIns="461010" rIns="45720" bIns="0" wrap="none">
+          <a:bodyPr rtlCol="0" anchor="t" lIns="45720" tIns="441960" rIns="45720" bIns="0" wrap="none">
             <a:noAutofit/>
           </a:bodyPr>
           <a:lstStyle/>
           <a:p>
             <a:pPr algn="ctr">
               <a:lnSpc>
-                <a:spcPts val="1439"/>
+                <a:spcPts val="1560"/>
               </a:lnSpc>
             </a:pPr>
             <a:r>
-              <a:rPr sz="1140" b="1">
+              <a:rPr sz="1200" b="1">
                 <a:solidFill>
-                  <a:srgbClr val="0A2342"/>
+                  <a:srgbClr val="FFFFFF"/>
                 </a:solidFill>
                 <a:latin typeface="Pretendard"/>
                 <a:ea typeface="Pretendard"/>
@@ -11710,13 +11710,13 @@
           <a:p>
             <a:pPr algn="ctr">
               <a:lnSpc>
-                <a:spcPts val="1140"/>
+                <a:spcPts val="1320"/>
               </a:lnSpc>
             </a:pPr>
             <a:r>
-              <a:rPr sz="869" b="0">
+              <a:rPr sz="1019" b="0">
                 <a:solidFill>
-                  <a:srgbClr val="3F4E61"/>
+                  <a:srgbClr val="FFFFFF"/>
                 </a:solidFill>
                 <a:latin typeface="Pretendard"/>
                 <a:ea typeface="Pretendard"/>
@@ -11735,7 +11735,7 @@
         </p:nvSpPr>
         <p:spPr>
           <a:xfrm>
-            <a:off x="8082915" y="3931285"/>
+            <a:off x="8082915" y="3912235"/>
             <a:ext cx="247650" cy="252730"/>
           </a:xfrm>
           <a:custGeom>
@@ -12470,7 +12470,7 @@
             </a:pathLst>
           </a:custGeom>
           <a:solidFill>
-            <a:srgbClr val="164B8C"/>
+            <a:srgbClr val="FFFFFF"/>
           </a:solidFill>
           <a:ln>
             <a:noFill/>
@@ -12493,13 +12493,13 @@
         <p:spPr>
           <a:xfrm>
             <a:off x="7399020" y="3848100"/>
-            <a:ext cx="198120" cy="198120"/>
+            <a:ext cx="213360" cy="213360"/>
           </a:xfrm>
           <a:prstGeom prst="ellipse">
             <a:avLst/>
           </a:prstGeom>
           <a:solidFill>
-            <a:srgbClr val="164B8C"/>
+            <a:srgbClr val="FFFFFF"/>
           </a:solidFill>
           <a:ln>
             <a:noFill/>
@@ -12513,9 +12513,9 @@
           <a:p>
             <a:pPr algn="ctr"/>
             <a:r>
-              <a:rPr sz="900" b="1">
+              <a:rPr sz="1019" b="1">
                 <a:solidFill>
-                  <a:srgbClr val="FFFFFF"/>
+                  <a:srgbClr val="0B2545"/>
                 </a:solidFill>
                 <a:latin typeface="Pretendard"/>
                 <a:ea typeface="Pretendard"/>
@@ -12545,27 +12545,27 @@
           <a:solidFill>
             <a:srgbClr val="FFFFFF"/>
           </a:solidFill>
-          <a:ln w="12192">
+          <a:ln w="13716">
             <a:solidFill>
-              <a:srgbClr val="6F9BD1"/>
+              <a:srgbClr val="8EC3EC"/>
             </a:solidFill>
           </a:ln>
         </p:spPr>
         <p:txBody>
-          <a:bodyPr rtlCol="0" anchor="t" lIns="45720" tIns="461010" rIns="45720" bIns="0" wrap="none">
+          <a:bodyPr rtlCol="0" anchor="t" lIns="45720" tIns="441960" rIns="45720" bIns="0" wrap="none">
             <a:noAutofit/>
           </a:bodyPr>
           <a:lstStyle/>
           <a:p>
             <a:pPr algn="ctr">
               <a:lnSpc>
-                <a:spcPts val="1439"/>
+                <a:spcPts val="1560"/>
               </a:lnSpc>
             </a:pPr>
             <a:r>
-              <a:rPr sz="1140" b="1">
+              <a:rPr sz="1200" b="1">
                 <a:solidFill>
-                  <a:srgbClr val="0A2342"/>
+                  <a:srgbClr val="0B2545"/>
                 </a:solidFill>
                 <a:latin typeface="Pretendard"/>
                 <a:ea typeface="Pretendard"/>
@@ -12577,11 +12577,11 @@
           <a:p>
             <a:pPr algn="ctr">
               <a:lnSpc>
-                <a:spcPts val="1140"/>
+                <a:spcPts val="1320"/>
               </a:lnSpc>
             </a:pPr>
             <a:r>
-              <a:rPr sz="869" b="0">
+              <a:rPr sz="1019" b="0">
                 <a:solidFill>
                   <a:srgbClr val="3F4E61"/>
                 </a:solidFill>
@@ -12602,7 +12602,7 @@
         </p:nvSpPr>
         <p:spPr>
           <a:xfrm>
-            <a:off x="3931920" y="4979670"/>
+            <a:off x="3931920" y="4960620"/>
             <a:ext cx="259080" cy="228600"/>
           </a:xfrm>
           <a:custGeom>
@@ -13017,7 +13017,7 @@
             </a:pathLst>
           </a:custGeom>
           <a:solidFill>
-            <a:srgbClr val="164B8C"/>
+            <a:srgbClr val="1F4E8C"/>
           </a:solidFill>
           <a:ln>
             <a:noFill/>
@@ -13040,13 +13040,13 @@
         <p:spPr>
           <a:xfrm>
             <a:off x="3177540" y="4884420"/>
-            <a:ext cx="198120" cy="198120"/>
+            <a:ext cx="213360" cy="213360"/>
           </a:xfrm>
           <a:prstGeom prst="ellipse">
             <a:avLst/>
           </a:prstGeom>
           <a:solidFill>
-            <a:srgbClr val="164B8C"/>
+            <a:srgbClr val="1F4E8C"/>
           </a:solidFill>
           <a:ln>
             <a:noFill/>
@@ -13060,7 +13060,7 @@
           <a:p>
             <a:pPr algn="ctr"/>
             <a:r>
-              <a:rPr sz="900" b="1">
+              <a:rPr sz="1019" b="1">
                 <a:solidFill>
                   <a:srgbClr val="FFFFFF"/>
                 </a:solidFill>
@@ -13092,27 +13092,27 @@
           <a:solidFill>
             <a:srgbClr val="FFFFFF"/>
           </a:solidFill>
-          <a:ln w="12192">
+          <a:ln w="13716">
             <a:solidFill>
-              <a:srgbClr val="6F9BD1"/>
+              <a:srgbClr val="8EC3EC"/>
             </a:solidFill>
           </a:ln>
         </p:spPr>
         <p:txBody>
-          <a:bodyPr rtlCol="0" anchor="t" lIns="45720" tIns="461010" rIns="45720" bIns="0" wrap="none">
+          <a:bodyPr rtlCol="0" anchor="t" lIns="45720" tIns="441960" rIns="45720" bIns="0" wrap="none">
             <a:noAutofit/>
           </a:bodyPr>
           <a:lstStyle/>
           <a:p>
             <a:pPr algn="ctr">
               <a:lnSpc>
-                <a:spcPts val="1439"/>
+                <a:spcPts val="1560"/>
               </a:lnSpc>
             </a:pPr>
             <a:r>
-              <a:rPr sz="1140" b="1">
+              <a:rPr sz="1200" b="1">
                 <a:solidFill>
-                  <a:srgbClr val="0A2342"/>
+                  <a:srgbClr val="0B2545"/>
                 </a:solidFill>
                 <a:latin typeface="Pretendard"/>
                 <a:ea typeface="Pretendard"/>
@@ -13124,11 +13124,11 @@
           <a:p>
             <a:pPr algn="ctr">
               <a:lnSpc>
-                <a:spcPts val="1140"/>
+                <a:spcPts val="1320"/>
               </a:lnSpc>
             </a:pPr>
             <a:r>
-              <a:rPr sz="869" b="0">
+              <a:rPr sz="1019" b="0">
                 <a:solidFill>
                   <a:srgbClr val="3F4E61"/>
                 </a:solidFill>
@@ -13136,7 +13136,7 @@
                 <a:ea typeface="Pretendard"/>
                 <a:cs typeface="Pretendard"/>
               </a:rPr>
-              <a:t>마지막 반영 → 검증 → setval</a:t>
+              <a:t>반영 → 검증 → setval</a:t>
             </a:r>
           </a:p>
         </p:txBody>
@@ -13149,7 +13149,7 @@
         </p:nvSpPr>
         <p:spPr>
           <a:xfrm>
-            <a:off x="5969000" y="4992370"/>
+            <a:off x="5969000" y="4973320"/>
             <a:ext cx="254000" cy="203200"/>
           </a:xfrm>
           <a:custGeom>
@@ -13226,7 +13226,7 @@
             </a:pathLst>
           </a:custGeom>
           <a:solidFill>
-            <a:srgbClr val="164B8C"/>
+            <a:srgbClr val="1F4E8C"/>
           </a:solidFill>
           <a:ln>
             <a:noFill/>
@@ -13249,13 +13249,13 @@
         <p:spPr>
           <a:xfrm>
             <a:off x="5212080" y="4884420"/>
-            <a:ext cx="198120" cy="198120"/>
+            <a:ext cx="213360" cy="213360"/>
           </a:xfrm>
           <a:prstGeom prst="ellipse">
             <a:avLst/>
           </a:prstGeom>
           <a:solidFill>
-            <a:srgbClr val="164B8C"/>
+            <a:srgbClr val="1F4E8C"/>
           </a:solidFill>
           <a:ln>
             <a:noFill/>
@@ -13269,7 +13269,7 @@
           <a:p>
             <a:pPr algn="ctr"/>
             <a:r>
-              <a:rPr sz="900" b="1">
+              <a:rPr sz="1019" b="1">
                 <a:solidFill>
                   <a:srgbClr val="FFFFFF"/>
                 </a:solidFill>
@@ -13301,27 +13301,27 @@
           <a:solidFill>
             <a:srgbClr val="FFFFFF"/>
           </a:solidFill>
-          <a:ln w="12192">
+          <a:ln w="13716">
             <a:solidFill>
-              <a:srgbClr val="6F9BD1"/>
+              <a:srgbClr val="8EC3EC"/>
             </a:solidFill>
           </a:ln>
         </p:spPr>
         <p:txBody>
-          <a:bodyPr rtlCol="0" anchor="t" lIns="45720" tIns="461010" rIns="45720" bIns="0" wrap="none">
+          <a:bodyPr rtlCol="0" anchor="t" lIns="45720" tIns="441960" rIns="45720" bIns="0" wrap="none">
             <a:noAutofit/>
           </a:bodyPr>
           <a:lstStyle/>
           <a:p>
             <a:pPr algn="ctr">
               <a:lnSpc>
-                <a:spcPts val="1439"/>
+                <a:spcPts val="1560"/>
               </a:lnSpc>
             </a:pPr>
             <a:r>
-              <a:rPr sz="1140" b="1">
+              <a:rPr sz="1200" b="1">
                 <a:solidFill>
-                  <a:srgbClr val="0A2342"/>
+                  <a:srgbClr val="0B2545"/>
                 </a:solidFill>
                 <a:latin typeface="Pretendard"/>
                 <a:ea typeface="Pretendard"/>
@@ -13333,11 +13333,11 @@
           <a:p>
             <a:pPr algn="ctr">
               <a:lnSpc>
-                <a:spcPts val="1140"/>
+                <a:spcPts val="1320"/>
               </a:lnSpc>
             </a:pPr>
             <a:r>
-              <a:rPr sz="869" b="0">
+              <a:rPr sz="1019" b="0">
                 <a:solidFill>
                   <a:srgbClr val="3F4E61"/>
                 </a:solidFill>
@@ -13345,7 +13345,7 @@
                 <a:ea typeface="Pretendard"/>
                 <a:cs typeface="Pretendard"/>
               </a:rPr>
-              <a:t>작업 상태 기계 · 이어 하기</a:t>
+              <a:t>상태 기계 · 이어 하기</a:t>
             </a:r>
           </a:p>
         </p:txBody>
@@ -13358,7 +13358,7 @@
         </p:nvSpPr>
         <p:spPr>
           <a:xfrm>
-            <a:off x="8028940" y="4972685"/>
+            <a:off x="8028940" y="4953635"/>
             <a:ext cx="203518" cy="234950"/>
           </a:xfrm>
           <a:custGeom>
@@ -13990,7 +13990,7 @@
             </a:pathLst>
           </a:custGeom>
           <a:solidFill>
-            <a:srgbClr val="164B8C"/>
+            <a:srgbClr val="1F4E8C"/>
           </a:solidFill>
           <a:ln>
             <a:noFill/>
@@ -14013,13 +14013,13 @@
         <p:spPr>
           <a:xfrm>
             <a:off x="7246620" y="4884420"/>
-            <a:ext cx="198120" cy="198120"/>
+            <a:ext cx="213360" cy="213360"/>
           </a:xfrm>
           <a:prstGeom prst="ellipse">
             <a:avLst/>
           </a:prstGeom>
           <a:solidFill>
-            <a:srgbClr val="164B8C"/>
+            <a:srgbClr val="1F4E8C"/>
           </a:solidFill>
           <a:ln>
             <a:noFill/>
@@ -14033,7 +14033,7 @@
           <a:p>
             <a:pPr algn="ctr"/>
             <a:r>
-              <a:rPr sz="900" b="1">
+              <a:rPr sz="1019" b="1">
                 <a:solidFill>
                   <a:srgbClr val="FFFFFF"/>
                 </a:solidFill>
@@ -14065,27 +14065,27 @@
           <a:solidFill>
             <a:srgbClr val="FFFFFF"/>
           </a:solidFill>
-          <a:ln w="12192">
+          <a:ln w="13716">
             <a:solidFill>
-              <a:srgbClr val="6F9BD1"/>
+              <a:srgbClr val="8EC3EC"/>
             </a:solidFill>
           </a:ln>
         </p:spPr>
         <p:txBody>
-          <a:bodyPr rtlCol="0" anchor="t" lIns="45720" tIns="461010" rIns="45720" bIns="0" wrap="none">
+          <a:bodyPr rtlCol="0" anchor="t" lIns="45720" tIns="441960" rIns="45720" bIns="0" wrap="none">
             <a:noAutofit/>
           </a:bodyPr>
           <a:lstStyle/>
           <a:p>
             <a:pPr algn="ctr">
               <a:lnSpc>
-                <a:spcPts val="1439"/>
+                <a:spcPts val="1560"/>
               </a:lnSpc>
             </a:pPr>
             <a:r>
-              <a:rPr sz="1140" b="1">
+              <a:rPr sz="1200" b="1">
                 <a:solidFill>
-                  <a:srgbClr val="0A2342"/>
+                  <a:srgbClr val="0B2545"/>
                 </a:solidFill>
                 <a:latin typeface="Pretendard"/>
                 <a:ea typeface="Pretendard"/>
@@ -14097,11 +14097,11 @@
           <a:p>
             <a:pPr algn="ctr">
               <a:lnSpc>
-                <a:spcPts val="1140"/>
+                <a:spcPts val="1320"/>
               </a:lnSpc>
             </a:pPr>
             <a:r>
-              <a:rPr sz="869" b="0">
+              <a:rPr sz="1019" b="0">
                 <a:solidFill>
                   <a:srgbClr val="3F4E61"/>
                 </a:solidFill>
@@ -14122,7 +14122,7 @@
         </p:nvSpPr>
         <p:spPr>
           <a:xfrm>
-            <a:off x="1295400" y="2907030"/>
+            <a:off x="1295400" y="2887980"/>
             <a:ext cx="228600" cy="228600"/>
           </a:xfrm>
           <a:custGeom>
@@ -14521,7 +14521,7 @@
             </a:pathLst>
           </a:custGeom>
           <a:solidFill>
-            <a:srgbClr val="164B8C"/>
+            <a:srgbClr val="1F4E8C"/>
           </a:solidFill>
           <a:ln>
             <a:noFill/>
@@ -14554,27 +14554,27 @@
           <a:solidFill>
             <a:srgbClr val="FFFFFF"/>
           </a:solidFill>
-          <a:ln w="12192">
+          <a:ln w="13716">
             <a:solidFill>
-              <a:srgbClr val="6F9BD1"/>
+              <a:srgbClr val="8EC3EC"/>
             </a:solidFill>
           </a:ln>
         </p:spPr>
         <p:txBody>
-          <a:bodyPr rtlCol="0" anchor="t" lIns="45720" tIns="461010" rIns="45720" bIns="0" wrap="none">
+          <a:bodyPr rtlCol="0" anchor="t" lIns="45720" tIns="441960" rIns="45720" bIns="0" wrap="none">
             <a:noAutofit/>
           </a:bodyPr>
           <a:lstStyle/>
           <a:p>
             <a:pPr algn="ctr">
               <a:lnSpc>
-                <a:spcPts val="1439"/>
+                <a:spcPts val="1560"/>
               </a:lnSpc>
             </a:pPr>
             <a:r>
-              <a:rPr sz="1140" b="1">
+              <a:rPr sz="1200" b="1">
                 <a:solidFill>
-                  <a:srgbClr val="0A2342"/>
+                  <a:srgbClr val="0B2545"/>
                 </a:solidFill>
                 <a:latin typeface="Pretendard"/>
                 <a:ea typeface="Pretendard"/>
@@ -14586,11 +14586,11 @@
           <a:p>
             <a:pPr algn="ctr">
               <a:lnSpc>
-                <a:spcPts val="1140"/>
+                <a:spcPts val="1320"/>
               </a:lnSpc>
             </a:pPr>
             <a:r>
-              <a:rPr sz="869" b="0">
+              <a:rPr sz="1019" b="0">
                 <a:solidFill>
                   <a:srgbClr val="3F4E61"/>
                 </a:solidFill>
@@ -14611,7 +14611,7 @@
         </p:nvSpPr>
         <p:spPr>
           <a:xfrm>
-            <a:off x="1295400" y="3943350"/>
+            <a:off x="1295400" y="3924300"/>
             <a:ext cx="261302" cy="263525"/>
           </a:xfrm>
           <a:custGeom>
@@ -15978,7 +15978,7 @@
             </a:pathLst>
           </a:custGeom>
           <a:solidFill>
-            <a:srgbClr val="164B8C"/>
+            <a:srgbClr val="1F4E8C"/>
           </a:solidFill>
           <a:ln>
             <a:noFill/>
@@ -16011,27 +16011,27 @@
           <a:solidFill>
             <a:srgbClr val="FFFFFF"/>
           </a:solidFill>
-          <a:ln w="12192">
+          <a:ln w="13716">
             <a:solidFill>
-              <a:srgbClr val="6F9BD1"/>
+              <a:srgbClr val="8EC3EC"/>
             </a:solidFill>
           </a:ln>
         </p:spPr>
         <p:txBody>
-          <a:bodyPr rtlCol="0" anchor="t" lIns="45720" tIns="461010" rIns="45720" bIns="0" wrap="none">
+          <a:bodyPr rtlCol="0" anchor="t" lIns="45720" tIns="441960" rIns="45720" bIns="0" wrap="none">
             <a:noAutofit/>
           </a:bodyPr>
           <a:lstStyle/>
           <a:p>
             <a:pPr algn="ctr">
               <a:lnSpc>
-                <a:spcPts val="1439"/>
+                <a:spcPts val="1560"/>
               </a:lnSpc>
             </a:pPr>
             <a:r>
-              <a:rPr sz="1140" b="1">
+              <a:rPr sz="1200" b="1">
                 <a:solidFill>
-                  <a:srgbClr val="0A2342"/>
+                  <a:srgbClr val="0B2545"/>
                 </a:solidFill>
                 <a:latin typeface="Pretendard"/>
                 <a:ea typeface="Pretendard"/>
@@ -16043,11 +16043,11 @@
           <a:p>
             <a:pPr algn="ctr">
               <a:lnSpc>
-                <a:spcPts val="1140"/>
+                <a:spcPts val="1320"/>
               </a:lnSpc>
             </a:pPr>
             <a:r>
-              <a:rPr sz="869" b="0">
+              <a:rPr sz="1019" b="0">
                 <a:solidFill>
                   <a:srgbClr val="3F4E61"/>
                 </a:solidFill>
@@ -16068,7 +16068,7 @@
         </p:nvSpPr>
         <p:spPr>
           <a:xfrm>
-            <a:off x="1282700" y="4966970"/>
+            <a:off x="1282700" y="4947920"/>
             <a:ext cx="254000" cy="254000"/>
           </a:xfrm>
           <a:custGeom>
@@ -16977,7 +16977,7 @@
             </a:pathLst>
           </a:custGeom>
           <a:solidFill>
-            <a:srgbClr val="164B8C"/>
+            <a:srgbClr val="1F4E8C"/>
           </a:solidFill>
           <a:ln>
             <a:noFill/>
@@ -17010,27 +17010,27 @@
           <a:solidFill>
             <a:srgbClr val="FFFFFF"/>
           </a:solidFill>
-          <a:ln w="12192">
+          <a:ln w="13716">
             <a:solidFill>
-              <a:srgbClr val="6F9BD1"/>
+              <a:srgbClr val="8EC3EC"/>
             </a:solidFill>
           </a:ln>
         </p:spPr>
         <p:txBody>
-          <a:bodyPr rtlCol="0" anchor="t" lIns="45720" tIns="906780" rIns="45720" bIns="0" wrap="none">
+          <a:bodyPr rtlCol="0" anchor="t" lIns="45720" tIns="876300" rIns="45720" bIns="0" wrap="none">
             <a:noAutofit/>
           </a:bodyPr>
           <a:lstStyle/>
           <a:p>
             <a:pPr algn="ctr">
               <a:lnSpc>
-                <a:spcPts val="1439"/>
+                <a:spcPts val="1560"/>
               </a:lnSpc>
             </a:pPr>
             <a:r>
-              <a:rPr sz="1140" b="1">
+              <a:rPr sz="1200" b="1">
                 <a:solidFill>
-                  <a:srgbClr val="0A2342"/>
+                  <a:srgbClr val="0B2545"/>
                 </a:solidFill>
                 <a:latin typeface="Pretendard"/>
                 <a:ea typeface="Pretendard"/>
@@ -17042,11 +17042,11 @@
           <a:p>
             <a:pPr algn="ctr">
               <a:lnSpc>
-                <a:spcPts val="1140"/>
+                <a:spcPts val="1320"/>
               </a:lnSpc>
             </a:pPr>
             <a:r>
-              <a:rPr sz="869" b="0">
+              <a:rPr sz="1019" b="0">
                 <a:solidFill>
                   <a:srgbClr val="3F4E61"/>
                 </a:solidFill>
@@ -17060,11 +17060,11 @@
           <a:p>
             <a:pPr algn="ctr">
               <a:lnSpc>
-                <a:spcPts val="1140"/>
+                <a:spcPts val="1320"/>
               </a:lnSpc>
             </a:pPr>
             <a:r>
-              <a:rPr sz="869" b="0">
+              <a:rPr sz="1019" b="0">
                 <a:solidFill>
                   <a:srgbClr val="3F4E61"/>
                 </a:solidFill>
@@ -17085,7 +17085,7 @@
         </p:nvSpPr>
         <p:spPr>
           <a:xfrm>
-            <a:off x="10629900" y="3352800"/>
+            <a:off x="10629900" y="3322320"/>
             <a:ext cx="228600" cy="228600"/>
           </a:xfrm>
           <a:custGeom>
@@ -17484,7 +17484,7 @@
             </a:pathLst>
           </a:custGeom>
           <a:solidFill>
-            <a:srgbClr val="164B8C"/>
+            <a:srgbClr val="1F4E8C"/>
           </a:solidFill>
           <a:ln>
             <a:noFill/>
@@ -17507,37 +17507,37 @@
         <p:spPr>
           <a:xfrm>
             <a:off x="9829800" y="4831080"/>
-            <a:ext cx="1828800" cy="929640"/>
+            <a:ext cx="1828800" cy="1021080"/>
           </a:xfrm>
           <a:prstGeom prst="roundRect">
             <a:avLst>
-              <a:gd name="adj" fmla="val 9836"/>
+              <a:gd name="adj" fmla="val 8955"/>
             </a:avLst>
           </a:prstGeom>
           <a:solidFill>
             <a:srgbClr val="FFFFFF"/>
           </a:solidFill>
-          <a:ln w="12192">
+          <a:ln w="13716">
             <a:solidFill>
-              <a:srgbClr val="6F9BD1"/>
+              <a:srgbClr val="8EC3EC"/>
             </a:solidFill>
           </a:ln>
         </p:spPr>
         <p:txBody>
-          <a:bodyPr rtlCol="0" anchor="t" lIns="45720" tIns="388620" rIns="45720" bIns="0" wrap="none">
+          <a:bodyPr rtlCol="0" anchor="t" lIns="45720" tIns="403860" rIns="45720" bIns="0" wrap="none">
             <a:noAutofit/>
           </a:bodyPr>
           <a:lstStyle/>
           <a:p>
             <a:pPr algn="ctr">
               <a:lnSpc>
-                <a:spcPts val="1439"/>
+                <a:spcPts val="1560"/>
               </a:lnSpc>
             </a:pPr>
             <a:r>
-              <a:rPr sz="1140" b="1">
+              <a:rPr sz="1200" b="1">
                 <a:solidFill>
-                  <a:srgbClr val="0A2342"/>
+                  <a:srgbClr val="0B2545"/>
                 </a:solidFill>
                 <a:latin typeface="Pretendard"/>
                 <a:ea typeface="Pretendard"/>
@@ -17549,11 +17549,11 @@
           <a:p>
             <a:pPr algn="ctr">
               <a:lnSpc>
-                <a:spcPts val="1140"/>
+                <a:spcPts val="1320"/>
               </a:lnSpc>
             </a:pPr>
             <a:r>
-              <a:rPr sz="869" b="0">
+              <a:rPr sz="1019" b="0">
                 <a:solidFill>
                   <a:srgbClr val="3F4E61"/>
                 </a:solidFill>
@@ -17561,17 +17561,17 @@
                 <a:ea typeface="Pretendard"/>
                 <a:cs typeface="Pretendard"/>
               </a:rPr>
-              <a:t>job · watermark · 오프셋</a:t>
+              <a:t>job · 워터마크 · 오프셋</a:t>
             </a:r>
           </a:p>
           <a:p>
             <a:pPr algn="ctr">
               <a:lnSpc>
-                <a:spcPts val="1140"/>
+                <a:spcPts val="1320"/>
               </a:lnSpc>
             </a:pPr>
             <a:r>
-              <a:rPr sz="869" b="0">
+              <a:rPr sz="1019" b="0">
                 <a:solidFill>
                   <a:srgbClr val="3F4E61"/>
                 </a:solidFill>
@@ -17579,7 +17579,7 @@
                 <a:ea typeface="Pretendard"/>
                 <a:cs typeface="Pretendard"/>
               </a:rPr>
-              <a:t>change_log · verify_result</a:t>
+              <a:t>change_log · 검증 결과</a:t>
             </a:r>
           </a:p>
         </p:txBody>
@@ -17592,7 +17592,7 @@
         </p:nvSpPr>
         <p:spPr>
           <a:xfrm>
-            <a:off x="10629900" y="4907280"/>
+            <a:off x="10629900" y="4922520"/>
             <a:ext cx="228600" cy="228600"/>
           </a:xfrm>
           <a:custGeom>
@@ -19369,7 +19369,7 @@
             </a:pathLst>
           </a:custGeom>
           <a:solidFill>
-            <a:srgbClr val="164B8C"/>
+            <a:srgbClr val="1F4E8C"/>
           </a:solidFill>
           <a:ln>
             <a:noFill/>
@@ -19393,15 +19393,15 @@
         </p:nvCxnSpPr>
         <p:spPr>
           <a:xfrm>
-            <a:off x="4061460" y="1188720"/>
-            <a:ext cx="0" cy="701040"/>
+            <a:off x="4061460" y="1280160"/>
+            <a:ext cx="0" cy="609600"/>
           </a:xfrm>
           <a:prstGeom prst="line">
             <a:avLst/>
           </a:prstGeom>
           <a:ln w="16764">
             <a:solidFill>
-              <a:srgbClr val="164B8C"/>
+              <a:srgbClr val="1F4E8C"/>
             </a:solidFill>
             <a:tailEnd type="triangle" w="med" len="med"/>
           </a:ln>
@@ -19415,8 +19415,8 @@
         </p:nvSpPr>
         <p:spPr>
           <a:xfrm>
-            <a:off x="4107180" y="1315212"/>
-            <a:ext cx="912876" cy="167640"/>
+            <a:off x="4107180" y="1367790"/>
+            <a:ext cx="1088898" cy="190500"/>
           </a:xfrm>
           <a:prstGeom prst="rect">
             <a:avLst/>
@@ -19433,9 +19433,9 @@
           <a:p>
             <a:pPr algn="ctr"/>
             <a:r>
-              <a:rPr sz="840" b="1">
+              <a:rPr sz="1019" b="1">
                 <a:solidFill>
-                  <a:srgbClr val="164B8C"/>
+                  <a:srgbClr val="1F4E8C"/>
                 </a:solidFill>
                 <a:latin typeface="Pretendard"/>
                 <a:ea typeface="Pretendard"/>
@@ -19456,15 +19456,15 @@
         </p:nvCxnSpPr>
         <p:spPr>
           <a:xfrm>
-            <a:off x="6096000" y="1188720"/>
-            <a:ext cx="0" cy="701040"/>
+            <a:off x="6096000" y="1280160"/>
+            <a:ext cx="0" cy="609600"/>
           </a:xfrm>
           <a:prstGeom prst="line">
             <a:avLst/>
           </a:prstGeom>
           <a:ln w="16764">
             <a:solidFill>
-              <a:srgbClr val="164B8C"/>
+              <a:srgbClr val="1F4E8C"/>
             </a:solidFill>
             <a:tailEnd type="triangle" w="med" len="med"/>
           </a:ln>
@@ -19478,8 +19478,8 @@
         </p:nvSpPr>
         <p:spPr>
           <a:xfrm>
-            <a:off x="6141720" y="1315212"/>
-            <a:ext cx="576834" cy="167640"/>
+            <a:off x="6141720" y="1367790"/>
+            <a:ext cx="680847" cy="190500"/>
           </a:xfrm>
           <a:prstGeom prst="rect">
             <a:avLst/>
@@ -19496,9 +19496,9 @@
           <a:p>
             <a:pPr algn="ctr"/>
             <a:r>
-              <a:rPr sz="840" b="1">
+              <a:rPr sz="1019" b="1">
                 <a:solidFill>
-                  <a:srgbClr val="164B8C"/>
+                  <a:srgbClr val="1F4E8C"/>
                 </a:solidFill>
                 <a:latin typeface="Pretendard"/>
                 <a:ea typeface="Pretendard"/>
@@ -19528,7 +19528,7 @@
           </a:prstGeom>
           <a:ln w="16764">
             <a:solidFill>
-              <a:srgbClr val="164B8C"/>
+              <a:srgbClr val="1F4E8C"/>
             </a:solidFill>
             <a:tailEnd type="triangle" w="med" len="med"/>
           </a:ln>
@@ -19536,14 +19536,14 @@
       </p:cxnSp>
       <p:sp>
         <p:nvSpPr>
-          <p:cNvPr id="55" name="라벨 SNAPSHOT 읽기"/>
+          <p:cNvPr id="55" name="라벨 kdms 읽기"/>
           <p:cNvSpPr txBox="1"/>
           <p:nvPr/>
         </p:nvSpPr>
         <p:spPr>
           <a:xfrm>
-            <a:off x="2288667" y="3025140"/>
-            <a:ext cx="832866" cy="167640"/>
+            <a:off x="2351722" y="3002280"/>
+            <a:ext cx="706755" cy="190500"/>
           </a:xfrm>
           <a:prstGeom prst="rect">
             <a:avLst/>
@@ -19560,15 +19560,15 @@
           <a:p>
             <a:pPr algn="ctr"/>
             <a:r>
-              <a:rPr sz="840" b="1">
+              <a:rPr sz="1019" b="1">
                 <a:solidFill>
-                  <a:srgbClr val="164B8C"/>
+                  <a:srgbClr val="1F4E8C"/>
                 </a:solidFill>
                 <a:latin typeface="Pretendard"/>
                 <a:ea typeface="Pretendard"/>
                 <a:cs typeface="Pretendard"/>
               </a:rPr>
-              <a:t>SNAPSHOT 읽기</a:t>
+              <a:t>kdms 읽기</a:t>
             </a:r>
           </a:p>
         </p:txBody>
@@ -19592,7 +19592,7 @@
           </a:prstGeom>
           <a:ln w="16764">
             <a:solidFill>
-              <a:srgbClr val="164B8C"/>
+              <a:srgbClr val="1F4E8C"/>
             </a:solidFill>
             <a:tailEnd type="triangle" w="med" len="med"/>
           </a:ln>
@@ -19616,7 +19616,7 @@
           </a:prstGeom>
           <a:ln w="16764">
             <a:solidFill>
-              <a:srgbClr val="164B8C"/>
+              <a:srgbClr val="1F4E8C"/>
             </a:solidFill>
             <a:tailEnd type="triangle" w="med" len="med"/>
           </a:ln>
@@ -19630,8 +19630,8 @@
         </p:nvSpPr>
         <p:spPr>
           <a:xfrm>
-            <a:off x="9149715" y="3025140"/>
-            <a:ext cx="598170" cy="167640"/>
+            <a:off x="9095422" y="3002280"/>
+            <a:ext cx="706755" cy="190500"/>
           </a:xfrm>
           <a:prstGeom prst="rect">
             <a:avLst/>
@@ -19648,9 +19648,9 @@
           <a:p>
             <a:pPr algn="ctr"/>
             <a:r>
-              <a:rPr sz="840" b="1">
+              <a:rPr sz="1019" b="1">
                 <a:solidFill>
-                  <a:srgbClr val="164B8C"/>
+                  <a:srgbClr val="1F4E8C"/>
                 </a:solidFill>
                 <a:latin typeface="Pretendard"/>
                 <a:ea typeface="Pretendard"/>
@@ -19680,7 +19680,7 @@
           </a:prstGeom>
           <a:ln w="16764">
             <a:solidFill>
-              <a:srgbClr val="1F74C4"/>
+              <a:srgbClr val="2B86C9"/>
             </a:solidFill>
             <a:prstDash val="dash"/>
             <a:tailEnd type="triangle" w="med" len="med"/>
@@ -19706,7 +19706,7 @@
           </a:prstGeom>
           <a:ln w="16764">
             <a:solidFill>
-              <a:srgbClr val="1F74C4"/>
+              <a:srgbClr val="2B86C9"/>
             </a:solidFill>
             <a:prstDash val="dash"/>
             <a:tailEnd type="triangle" w="med" len="med"/>
@@ -19721,8 +19721,8 @@
         </p:nvSpPr>
         <p:spPr>
           <a:xfrm>
-            <a:off x="2416683" y="4061460"/>
-            <a:ext cx="576834" cy="167640"/>
+            <a:off x="2364676" y="4038600"/>
+            <a:ext cx="680847" cy="190500"/>
           </a:xfrm>
           <a:prstGeom prst="rect">
             <a:avLst/>
@@ -19739,9 +19739,9 @@
           <a:p>
             <a:pPr algn="ctr"/>
             <a:r>
-              <a:rPr sz="840" b="1">
+              <a:rPr sz="1019" b="1">
                 <a:solidFill>
-                  <a:srgbClr val="1F74C4"/>
+                  <a:srgbClr val="2B86C9"/>
                 </a:solidFill>
                 <a:latin typeface="Pretendard"/>
                 <a:ea typeface="Pretendard"/>
@@ -19771,7 +19771,7 @@
           </a:prstGeom>
           <a:ln w="16764">
             <a:solidFill>
-              <a:srgbClr val="1F74C4"/>
+              <a:srgbClr val="2B86C9"/>
             </a:solidFill>
             <a:prstDash val="dash"/>
             <a:tailEnd type="triangle" w="med" len="med"/>
@@ -19797,7 +19797,7 @@
           </a:prstGeom>
           <a:ln w="16764">
             <a:solidFill>
-              <a:srgbClr val="1F74C4"/>
+              <a:srgbClr val="2B86C9"/>
             </a:solidFill>
             <a:prstDash val="dash"/>
             <a:tailEnd type="triangle" w="med" len="med"/>
@@ -19822,7 +19822,7 @@
           </a:prstGeom>
           <a:ln w="16764">
             <a:solidFill>
-              <a:srgbClr val="1F74C4"/>
+              <a:srgbClr val="2B86C9"/>
             </a:solidFill>
             <a:prstDash val="dash"/>
             <a:tailEnd type="triangle" w="med" len="med"/>
@@ -19837,8 +19837,8 @@
         </p:nvSpPr>
         <p:spPr>
           <a:xfrm>
-            <a:off x="9160383" y="4061460"/>
-            <a:ext cx="576834" cy="167640"/>
+            <a:off x="9108376" y="4038600"/>
+            <a:ext cx="680847" cy="190500"/>
           </a:xfrm>
           <a:prstGeom prst="rect">
             <a:avLst/>
@@ -19855,9 +19855,9 @@
           <a:p>
             <a:pPr algn="ctr"/>
             <a:r>
-              <a:rPr sz="840" b="1">
+              <a:rPr sz="1019" b="1">
                 <a:solidFill>
-                  <a:srgbClr val="1F74C4"/>
+                  <a:srgbClr val="2B86C9"/>
                 </a:solidFill>
                 <a:latin typeface="Pretendard"/>
                 <a:ea typeface="Pretendard"/>
@@ -19880,14 +19880,14 @@
         <p:spPr>
           <a:xfrm>
             <a:off x="9067800" y="5295900"/>
-            <a:ext cx="762000" cy="0"/>
+            <a:ext cx="762000" cy="45720"/>
           </a:xfrm>
-          <a:prstGeom prst="line">
+          <a:prstGeom prst="bentConnector3">
             <a:avLst/>
           </a:prstGeom>
           <a:ln w="16764">
             <a:solidFill>
-              <a:srgbClr val="164B8C"/>
+              <a:srgbClr val="1F4E8C"/>
             </a:solidFill>
             <a:tailEnd type="triangle" w="med" len="med"/>
           </a:ln>
@@ -19901,8 +19901,8 @@
         </p:nvSpPr>
         <p:spPr>
           <a:xfrm>
-            <a:off x="9160383" y="5097780"/>
-            <a:ext cx="576834" cy="167640"/>
+            <a:off x="8917876" y="5074920"/>
+            <a:ext cx="680847" cy="190500"/>
           </a:xfrm>
           <a:prstGeom prst="rect">
             <a:avLst/>
@@ -19919,9 +19919,9 @@
           <a:p>
             <a:pPr algn="ctr"/>
             <a:r>
-              <a:rPr sz="840" b="1">
+              <a:rPr sz="1019" b="1">
                 <a:solidFill>
-                  <a:srgbClr val="164B8C"/>
+                  <a:srgbClr val="1F4E8C"/>
                 </a:solidFill>
                 <a:latin typeface="Pretendard"/>
                 <a:ea typeface="Pretendard"/>
@@ -19941,7 +19941,7 @@
         <p:spPr>
           <a:xfrm>
             <a:off x="381000" y="6309360"/>
-            <a:ext cx="3442335" cy="396240"/>
+            <a:ext cx="3665601" cy="396240"/>
           </a:xfrm>
           <a:prstGeom prst="roundRect">
             <a:avLst>
@@ -19953,7 +19953,7 @@
           </a:solidFill>
           <a:ln w="10668">
             <a:solidFill>
-              <a:srgbClr val="A9C3E2"/>
+              <a:srgbClr val="8EC3EC"/>
             </a:solidFill>
           </a:ln>
         </p:spPr>
@@ -19989,9 +19989,9 @@
           <a:p>
             <a:pPr algn="l"/>
             <a:r>
-              <a:rPr sz="900" b="1">
+              <a:rPr sz="1019" b="1">
                 <a:solidFill>
-                  <a:srgbClr val="0A2342"/>
+                  <a:srgbClr val="0B2545"/>
                 </a:solidFill>
                 <a:latin typeface="Pretendard"/>
                 <a:ea typeface="Pretendard"/>
@@ -20018,7 +20018,7 @@
           </a:prstGeom>
           <a:ln w="16764">
             <a:solidFill>
-              <a:srgbClr val="164B8C"/>
+              <a:srgbClr val="1F4E8C"/>
             </a:solidFill>
             <a:tailEnd type="triangle" w="med" len="med"/>
           </a:ln>
@@ -20033,7 +20033,7 @@
         <p:spPr>
           <a:xfrm>
             <a:off x="1341120" y="6309360"/>
-            <a:ext cx="786765" cy="396240"/>
+            <a:ext cx="871347" cy="396240"/>
           </a:xfrm>
           <a:prstGeom prst="rect">
             <a:avLst/>
@@ -20048,7 +20048,7 @@
           <a:p>
             <a:pPr algn="l"/>
             <a:r>
-              <a:rPr sz="900" b="1">
+              <a:rPr sz="1019" b="1">
                 <a:solidFill>
                   <a:srgbClr val="16202C"/>
                 </a:solidFill>
@@ -20069,7 +20069,7 @@
         </p:nvCxnSpPr>
         <p:spPr>
           <a:xfrm>
-            <a:off x="2204085" y="6507480"/>
+            <a:off x="2288667" y="6507480"/>
             <a:ext cx="350520" cy="0"/>
           </a:xfrm>
           <a:prstGeom prst="line">
@@ -20077,7 +20077,7 @@
           </a:prstGeom>
           <a:ln w="16764">
             <a:solidFill>
-              <a:srgbClr val="1F74C4"/>
+              <a:srgbClr val="2B86C9"/>
             </a:solidFill>
             <a:prstDash val="dash"/>
             <a:tailEnd type="triangle" w="med" len="med"/>
@@ -20092,8 +20092,8 @@
         </p:nvSpPr>
         <p:spPr>
           <a:xfrm>
-            <a:off x="2630805" y="6309360"/>
-            <a:ext cx="1192530" cy="396240"/>
+            <a:off x="2715387" y="6309360"/>
+            <a:ext cx="1331214" cy="396240"/>
           </a:xfrm>
           <a:prstGeom prst="rect">
             <a:avLst/>
@@ -20108,7 +20108,7 @@
           <a:p>
             <a:pPr algn="l"/>
             <a:r>
-              <a:rPr sz="900" b="1">
+              <a:rPr sz="1019" b="1">
                 <a:solidFill>
                   <a:srgbClr val="16202C"/>
                 </a:solidFill>
@@ -20129,8 +20129,8 @@
         </p:nvSpPr>
         <p:spPr>
           <a:xfrm>
-            <a:off x="6929628" y="6385560"/>
-            <a:ext cx="4881372" cy="167640"/>
+            <a:off x="5948934" y="6347460"/>
+            <a:ext cx="5862066" cy="190500"/>
           </a:xfrm>
           <a:prstGeom prst="rect">
             <a:avLst/>
@@ -20145,7 +20145,7 @@
           <a:p>
             <a:pPr algn="r"/>
             <a:r>
-              <a:rPr sz="840" b="0">
+              <a:rPr sz="1019" b="0">
                 <a:solidFill>
                   <a:srgbClr val="3F4E61"/>
                 </a:solidFill>
@@ -20166,8 +20166,8 @@
         </p:nvSpPr>
         <p:spPr>
           <a:xfrm>
-            <a:off x="5878830" y="6553200"/>
-            <a:ext cx="5932170" cy="167640"/>
+            <a:off x="4672965" y="6537960"/>
+            <a:ext cx="7138035" cy="190500"/>
           </a:xfrm>
           <a:prstGeom prst="rect">
             <a:avLst/>
@@ -20182,7 +20182,7 @@
           <a:p>
             <a:pPr algn="r"/>
             <a:r>
-              <a:rPr sz="840" b="0">
+              <a:rPr sz="1019" b="0">
                 <a:solidFill>
                   <a:srgbClr val="3F4E61"/>
                 </a:solidFill>

--- a/docs/design/dist/d01-system-architecture.pptx
+++ b/docs/design/dist/d01-system-architecture.pptx
@@ -3113,7 +3113,7 @@
             </a:avLst>
           </a:prstGeom>
           <a:solidFill>
-            <a:srgbClr val="1F4E8C"/>
+            <a:srgbClr val="1E6B4F"/>
           </a:solidFill>
           <a:ln>
             <a:noFill/>
@@ -3153,7 +3153,7 @@
             <a:r>
               <a:rPr sz="2160" b="1">
                 <a:solidFill>
-                  <a:srgbClr val="0B2545"/>
+                  <a:srgbClr val="0B3D2E"/>
                 </a:solidFill>
                 <a:latin typeface="Pretendard"/>
                 <a:ea typeface="Pretendard"/>
@@ -3255,11 +3255,11 @@
             </a:avLst>
           </a:prstGeom>
           <a:solidFill>
-            <a:srgbClr val="EEF6FD"/>
+            <a:srgbClr val="EEF8F3"/>
           </a:solidFill>
           <a:ln w="10668">
             <a:solidFill>
-              <a:srgbClr val="8EC3EC"/>
+              <a:srgbClr val="9DD3B8"/>
             </a:solidFill>
           </a:ln>
         </p:spPr>
@@ -3277,7 +3277,7 @@
             <a:r>
               <a:rPr sz="1200" b="1">
                 <a:solidFill>
-                  <a:srgbClr val="0B2545"/>
+                  <a:srgbClr val="0B3D2E"/>
                 </a:solidFill>
                 <a:latin typeface="Pretendard"/>
                 <a:ea typeface="Pretendard"/>
@@ -3323,11 +3323,11 @@
             </a:avLst>
           </a:prstGeom>
           <a:solidFill>
-            <a:srgbClr val="EEF6FD"/>
+            <a:srgbClr val="EEF8F3"/>
           </a:solidFill>
           <a:ln w="15240">
             <a:solidFill>
-              <a:srgbClr val="1F4E8C"/>
+              <a:srgbClr val="1E6B4F"/>
             </a:solidFill>
           </a:ln>
         </p:spPr>
@@ -3345,7 +3345,7 @@
             <a:r>
               <a:rPr sz="1200" b="1">
                 <a:solidFill>
-                  <a:srgbClr val="0B2545"/>
+                  <a:srgbClr val="0B3D2E"/>
                 </a:solidFill>
                 <a:latin typeface="Pretendard"/>
                 <a:ea typeface="Pretendard"/>
@@ -3391,11 +3391,11 @@
             </a:avLst>
           </a:prstGeom>
           <a:solidFill>
-            <a:srgbClr val="EEF6FD"/>
+            <a:srgbClr val="EEF8F3"/>
           </a:solidFill>
           <a:ln w="10668">
             <a:solidFill>
-              <a:srgbClr val="8EC3EC"/>
+              <a:srgbClr val="9DD3B8"/>
             </a:solidFill>
           </a:ln>
         </p:spPr>
@@ -3413,7 +3413,7 @@
             <a:r>
               <a:rPr sz="1200" b="1">
                 <a:solidFill>
-                  <a:srgbClr val="0B2545"/>
+                  <a:srgbClr val="0B3D2E"/>
                 </a:solidFill>
                 <a:latin typeface="Pretendard"/>
                 <a:ea typeface="Pretendard"/>
@@ -3463,7 +3463,7 @@
           </a:solidFill>
           <a:ln w="15240">
             <a:solidFill>
-              <a:srgbClr val="1F4E8C"/>
+              <a:srgbClr val="1E6B4F"/>
             </a:solidFill>
           </a:ln>
         </p:spPr>
@@ -3477,7 +3477,7 @@
             <a:r>
               <a:rPr sz="1080" b="1">
                 <a:solidFill>
-                  <a:srgbClr val="0B2545"/>
+                  <a:srgbClr val="0B3D2E"/>
                 </a:solidFill>
                 <a:latin typeface="Pretendard"/>
                 <a:ea typeface="Pretendard"/>
@@ -4697,7 +4697,7 @@
             </a:pathLst>
           </a:custGeom>
           <a:solidFill>
-            <a:srgbClr val="1F4E8C"/>
+            <a:srgbClr val="1E6B4F"/>
           </a:solidFill>
           <a:ln>
             <a:noFill/>
@@ -4732,7 +4732,7 @@
           </a:solidFill>
           <a:ln w="13716">
             <a:solidFill>
-              <a:srgbClr val="8EC3EC"/>
+              <a:srgbClr val="9DD3B8"/>
             </a:solidFill>
           </a:ln>
         </p:spPr>
@@ -4750,7 +4750,7 @@
             <a:r>
               <a:rPr sz="1200" b="1">
                 <a:solidFill>
-                  <a:srgbClr val="0B2545"/>
+                  <a:srgbClr val="0B3D2E"/>
                 </a:solidFill>
                 <a:latin typeface="Pretendard"/>
                 <a:ea typeface="Pretendard"/>
@@ -5154,7 +5154,7 @@
             </a:pathLst>
           </a:custGeom>
           <a:solidFill>
-            <a:srgbClr val="1F4E8C"/>
+            <a:srgbClr val="1E6B4F"/>
           </a:solidFill>
           <a:ln>
             <a:noFill/>
@@ -5189,7 +5189,7 @@
           </a:solidFill>
           <a:ln w="13716">
             <a:solidFill>
-              <a:srgbClr val="8EC3EC"/>
+              <a:srgbClr val="9DD3B8"/>
             </a:solidFill>
           </a:ln>
         </p:spPr>
@@ -5207,7 +5207,7 @@
             <a:r>
               <a:rPr sz="1200" b="1">
                 <a:solidFill>
-                  <a:srgbClr val="0B2545"/>
+                  <a:srgbClr val="0B3D2E"/>
                 </a:solidFill>
                 <a:latin typeface="Pretendard"/>
                 <a:ea typeface="Pretendard"/>
@@ -5617,7 +5617,7 @@
             </a:pathLst>
           </a:custGeom>
           <a:solidFill>
-            <a:srgbClr val="1F4E8C"/>
+            <a:srgbClr val="1E6B4F"/>
           </a:solidFill>
           <a:ln>
             <a:noFill/>
@@ -5652,7 +5652,7 @@
           </a:solidFill>
           <a:ln w="13716">
             <a:solidFill>
-              <a:srgbClr val="8EC3EC"/>
+              <a:srgbClr val="9DD3B8"/>
             </a:solidFill>
           </a:ln>
         </p:spPr>
@@ -5670,7 +5670,7 @@
             <a:r>
               <a:rPr sz="1200" b="1">
                 <a:solidFill>
-                  <a:srgbClr val="0B2545"/>
+                  <a:srgbClr val="0B3D2E"/>
                 </a:solidFill>
                 <a:latin typeface="Pretendard"/>
                 <a:ea typeface="Pretendard"/>
@@ -6998,7 +6998,7 @@
             </a:pathLst>
           </a:custGeom>
           <a:solidFill>
-            <a:srgbClr val="1F4E8C"/>
+            <a:srgbClr val="1E6B4F"/>
           </a:solidFill>
           <a:ln>
             <a:noFill/>
@@ -7033,7 +7033,7 @@
           </a:solidFill>
           <a:ln w="13716">
             <a:solidFill>
-              <a:srgbClr val="8EC3EC"/>
+              <a:srgbClr val="9DD3B8"/>
             </a:solidFill>
           </a:ln>
         </p:spPr>
@@ -7051,7 +7051,7 @@
             <a:r>
               <a:rPr sz="1200" b="1">
                 <a:solidFill>
-                  <a:srgbClr val="0B2545"/>
+                  <a:srgbClr val="0B3D2E"/>
                 </a:solidFill>
                 <a:latin typeface="Pretendard"/>
                 <a:ea typeface="Pretendard"/>
@@ -7255,7 +7255,7 @@
             </a:pathLst>
           </a:custGeom>
           <a:solidFill>
-            <a:srgbClr val="1F4E8C"/>
+            <a:srgbClr val="1E6B4F"/>
           </a:solidFill>
           <a:ln>
             <a:noFill/>
@@ -7284,7 +7284,7 @@
             <a:avLst/>
           </a:prstGeom>
           <a:solidFill>
-            <a:srgbClr val="1F4E8C"/>
+            <a:srgbClr val="1E6B4F"/>
           </a:solidFill>
           <a:ln>
             <a:noFill/>
@@ -7332,7 +7332,7 @@
           </a:solidFill>
           <a:ln w="13716">
             <a:solidFill>
-              <a:srgbClr val="8EC3EC"/>
+              <a:srgbClr val="9DD3B8"/>
             </a:solidFill>
           </a:ln>
         </p:spPr>
@@ -7350,7 +7350,7 @@
             <a:r>
               <a:rPr sz="1200" b="1">
                 <a:solidFill>
-                  <a:srgbClr val="0B2545"/>
+                  <a:srgbClr val="0B3D2E"/>
                 </a:solidFill>
                 <a:latin typeface="Pretendard"/>
                 <a:ea typeface="Pretendard"/>
@@ -9643,7 +9643,7 @@
             </a:pathLst>
           </a:custGeom>
           <a:solidFill>
-            <a:srgbClr val="1F4E8C"/>
+            <a:srgbClr val="1E6B4F"/>
           </a:solidFill>
           <a:ln>
             <a:noFill/>
@@ -9672,7 +9672,7 @@
             <a:avLst/>
           </a:prstGeom>
           <a:solidFill>
-            <a:srgbClr val="1F4E8C"/>
+            <a:srgbClr val="1E6B4F"/>
           </a:solidFill>
           <a:ln>
             <a:noFill/>
@@ -9716,11 +9716,11 @@
             </a:avLst>
           </a:prstGeom>
           <a:solidFill>
-            <a:srgbClr val="0B2545"/>
+            <a:srgbClr val="0B3D2E"/>
           </a:solidFill>
           <a:ln w="18288">
             <a:solidFill>
-              <a:srgbClr val="0B2545"/>
+              <a:srgbClr val="0B3D2E"/>
             </a:solidFill>
           </a:ln>
         </p:spPr>
@@ -10473,7 +10473,7 @@
             <a:r>
               <a:rPr sz="1019" b="1">
                 <a:solidFill>
-                  <a:srgbClr val="0B2545"/>
+                  <a:srgbClr val="0B3D2E"/>
                 </a:solidFill>
                 <a:latin typeface="Pretendard"/>
                 <a:ea typeface="Pretendard"/>
@@ -10505,7 +10505,7 @@
           </a:solidFill>
           <a:ln w="13716">
             <a:solidFill>
-              <a:srgbClr val="8EC3EC"/>
+              <a:srgbClr val="9DD3B8"/>
             </a:solidFill>
           </a:ln>
         </p:spPr>
@@ -10523,7 +10523,7 @@
             <a:r>
               <a:rPr sz="1200" b="1">
                 <a:solidFill>
-                  <a:srgbClr val="0B2545"/>
+                  <a:srgbClr val="0B3D2E"/>
                 </a:solidFill>
                 <a:latin typeface="Pretendard"/>
                 <a:ea typeface="Pretendard"/>
@@ -11645,7 +11645,7 @@
             </a:pathLst>
           </a:custGeom>
           <a:solidFill>
-            <a:srgbClr val="1F4E8C"/>
+            <a:srgbClr val="1E6B4F"/>
           </a:solidFill>
           <a:ln>
             <a:noFill/>
@@ -11676,11 +11676,11 @@
             </a:avLst>
           </a:prstGeom>
           <a:solidFill>
-            <a:srgbClr val="0B2545"/>
+            <a:srgbClr val="0B3D2E"/>
           </a:solidFill>
           <a:ln w="18288">
             <a:solidFill>
-              <a:srgbClr val="0B2545"/>
+              <a:srgbClr val="0B3D2E"/>
             </a:solidFill>
           </a:ln>
         </p:spPr>
@@ -12515,7 +12515,7 @@
             <a:r>
               <a:rPr sz="1019" b="1">
                 <a:solidFill>
-                  <a:srgbClr val="0B2545"/>
+                  <a:srgbClr val="0B3D2E"/>
                 </a:solidFill>
                 <a:latin typeface="Pretendard"/>
                 <a:ea typeface="Pretendard"/>
@@ -12547,7 +12547,7 @@
           </a:solidFill>
           <a:ln w="13716">
             <a:solidFill>
-              <a:srgbClr val="8EC3EC"/>
+              <a:srgbClr val="9DD3B8"/>
             </a:solidFill>
           </a:ln>
         </p:spPr>
@@ -12565,7 +12565,7 @@
             <a:r>
               <a:rPr sz="1200" b="1">
                 <a:solidFill>
-                  <a:srgbClr val="0B2545"/>
+                  <a:srgbClr val="0B3D2E"/>
                 </a:solidFill>
                 <a:latin typeface="Pretendard"/>
                 <a:ea typeface="Pretendard"/>
@@ -13017,7 +13017,7 @@
             </a:pathLst>
           </a:custGeom>
           <a:solidFill>
-            <a:srgbClr val="1F4E8C"/>
+            <a:srgbClr val="1E6B4F"/>
           </a:solidFill>
           <a:ln>
             <a:noFill/>
@@ -13046,7 +13046,7 @@
             <a:avLst/>
           </a:prstGeom>
           <a:solidFill>
-            <a:srgbClr val="1F4E8C"/>
+            <a:srgbClr val="1E6B4F"/>
           </a:solidFill>
           <a:ln>
             <a:noFill/>
@@ -13094,7 +13094,7 @@
           </a:solidFill>
           <a:ln w="13716">
             <a:solidFill>
-              <a:srgbClr val="8EC3EC"/>
+              <a:srgbClr val="9DD3B8"/>
             </a:solidFill>
           </a:ln>
         </p:spPr>
@@ -13112,7 +13112,7 @@
             <a:r>
               <a:rPr sz="1200" b="1">
                 <a:solidFill>
-                  <a:srgbClr val="0B2545"/>
+                  <a:srgbClr val="0B3D2E"/>
                 </a:solidFill>
                 <a:latin typeface="Pretendard"/>
                 <a:ea typeface="Pretendard"/>
@@ -13226,7 +13226,7 @@
             </a:pathLst>
           </a:custGeom>
           <a:solidFill>
-            <a:srgbClr val="1F4E8C"/>
+            <a:srgbClr val="1E6B4F"/>
           </a:solidFill>
           <a:ln>
             <a:noFill/>
@@ -13255,7 +13255,7 @@
             <a:avLst/>
           </a:prstGeom>
           <a:solidFill>
-            <a:srgbClr val="1F4E8C"/>
+            <a:srgbClr val="1E6B4F"/>
           </a:solidFill>
           <a:ln>
             <a:noFill/>
@@ -13303,7 +13303,7 @@
           </a:solidFill>
           <a:ln w="13716">
             <a:solidFill>
-              <a:srgbClr val="8EC3EC"/>
+              <a:srgbClr val="9DD3B8"/>
             </a:solidFill>
           </a:ln>
         </p:spPr>
@@ -13321,7 +13321,7 @@
             <a:r>
               <a:rPr sz="1200" b="1">
                 <a:solidFill>
-                  <a:srgbClr val="0B2545"/>
+                  <a:srgbClr val="0B3D2E"/>
                 </a:solidFill>
                 <a:latin typeface="Pretendard"/>
                 <a:ea typeface="Pretendard"/>
@@ -13990,7 +13990,7 @@
             </a:pathLst>
           </a:custGeom>
           <a:solidFill>
-            <a:srgbClr val="1F4E8C"/>
+            <a:srgbClr val="1E6B4F"/>
           </a:solidFill>
           <a:ln>
             <a:noFill/>
@@ -14019,7 +14019,7 @@
             <a:avLst/>
           </a:prstGeom>
           <a:solidFill>
-            <a:srgbClr val="1F4E8C"/>
+            <a:srgbClr val="1E6B4F"/>
           </a:solidFill>
           <a:ln>
             <a:noFill/>
@@ -14067,7 +14067,7 @@
           </a:solidFill>
           <a:ln w="13716">
             <a:solidFill>
-              <a:srgbClr val="8EC3EC"/>
+              <a:srgbClr val="9DD3B8"/>
             </a:solidFill>
           </a:ln>
         </p:spPr>
@@ -14085,7 +14085,7 @@
             <a:r>
               <a:rPr sz="1200" b="1">
                 <a:solidFill>
-                  <a:srgbClr val="0B2545"/>
+                  <a:srgbClr val="0B3D2E"/>
                 </a:solidFill>
                 <a:latin typeface="Pretendard"/>
                 <a:ea typeface="Pretendard"/>
@@ -14521,7 +14521,7 @@
             </a:pathLst>
           </a:custGeom>
           <a:solidFill>
-            <a:srgbClr val="1F4E8C"/>
+            <a:srgbClr val="1E6B4F"/>
           </a:solidFill>
           <a:ln>
             <a:noFill/>
@@ -14556,7 +14556,7 @@
           </a:solidFill>
           <a:ln w="13716">
             <a:solidFill>
-              <a:srgbClr val="8EC3EC"/>
+              <a:srgbClr val="9DD3B8"/>
             </a:solidFill>
           </a:ln>
         </p:spPr>
@@ -14574,7 +14574,7 @@
             <a:r>
               <a:rPr sz="1200" b="1">
                 <a:solidFill>
-                  <a:srgbClr val="0B2545"/>
+                  <a:srgbClr val="0B3D2E"/>
                 </a:solidFill>
                 <a:latin typeface="Pretendard"/>
                 <a:ea typeface="Pretendard"/>
@@ -15978,7 +15978,7 @@
             </a:pathLst>
           </a:custGeom>
           <a:solidFill>
-            <a:srgbClr val="1F4E8C"/>
+            <a:srgbClr val="1E6B4F"/>
           </a:solidFill>
           <a:ln>
             <a:noFill/>
@@ -16013,7 +16013,7 @@
           </a:solidFill>
           <a:ln w="13716">
             <a:solidFill>
-              <a:srgbClr val="8EC3EC"/>
+              <a:srgbClr val="9DD3B8"/>
             </a:solidFill>
           </a:ln>
         </p:spPr>
@@ -16031,7 +16031,7 @@
             <a:r>
               <a:rPr sz="1200" b="1">
                 <a:solidFill>
-                  <a:srgbClr val="0B2545"/>
+                  <a:srgbClr val="0B3D2E"/>
                 </a:solidFill>
                 <a:latin typeface="Pretendard"/>
                 <a:ea typeface="Pretendard"/>
@@ -16977,7 +16977,7 @@
             </a:pathLst>
           </a:custGeom>
           <a:solidFill>
-            <a:srgbClr val="1F4E8C"/>
+            <a:srgbClr val="1E6B4F"/>
           </a:solidFill>
           <a:ln>
             <a:noFill/>
@@ -17012,7 +17012,7 @@
           </a:solidFill>
           <a:ln w="13716">
             <a:solidFill>
-              <a:srgbClr val="8EC3EC"/>
+              <a:srgbClr val="9DD3B8"/>
             </a:solidFill>
           </a:ln>
         </p:spPr>
@@ -17030,7 +17030,7 @@
             <a:r>
               <a:rPr sz="1200" b="1">
                 <a:solidFill>
-                  <a:srgbClr val="0B2545"/>
+                  <a:srgbClr val="0B3D2E"/>
                 </a:solidFill>
                 <a:latin typeface="Pretendard"/>
                 <a:ea typeface="Pretendard"/>
@@ -17484,7 +17484,7 @@
             </a:pathLst>
           </a:custGeom>
           <a:solidFill>
-            <a:srgbClr val="1F4E8C"/>
+            <a:srgbClr val="1E6B4F"/>
           </a:solidFill>
           <a:ln>
             <a:noFill/>
@@ -17519,7 +17519,7 @@
           </a:solidFill>
           <a:ln w="13716">
             <a:solidFill>
-              <a:srgbClr val="8EC3EC"/>
+              <a:srgbClr val="9DD3B8"/>
             </a:solidFill>
           </a:ln>
         </p:spPr>
@@ -17537,7 +17537,7 @@
             <a:r>
               <a:rPr sz="1200" b="1">
                 <a:solidFill>
-                  <a:srgbClr val="0B2545"/>
+                  <a:srgbClr val="0B3D2E"/>
                 </a:solidFill>
                 <a:latin typeface="Pretendard"/>
                 <a:ea typeface="Pretendard"/>
@@ -19369,7 +19369,7 @@
             </a:pathLst>
           </a:custGeom>
           <a:solidFill>
-            <a:srgbClr val="1F4E8C"/>
+            <a:srgbClr val="1E6B4F"/>
           </a:solidFill>
           <a:ln>
             <a:noFill/>
@@ -19401,7 +19401,7 @@
           </a:prstGeom>
           <a:ln w="16764">
             <a:solidFill>
-              <a:srgbClr val="1F4E8C"/>
+              <a:srgbClr val="1E6B4F"/>
             </a:solidFill>
             <a:tailEnd type="triangle" w="med" len="med"/>
           </a:ln>
@@ -19435,7 +19435,7 @@
             <a:r>
               <a:rPr sz="1019" b="1">
                 <a:solidFill>
-                  <a:srgbClr val="1F4E8C"/>
+                  <a:srgbClr val="1E6B4F"/>
                 </a:solidFill>
                 <a:latin typeface="Pretendard"/>
                 <a:ea typeface="Pretendard"/>
@@ -19464,7 +19464,7 @@
           </a:prstGeom>
           <a:ln w="16764">
             <a:solidFill>
-              <a:srgbClr val="1F4E8C"/>
+              <a:srgbClr val="1E6B4F"/>
             </a:solidFill>
             <a:tailEnd type="triangle" w="med" len="med"/>
           </a:ln>
@@ -19498,7 +19498,7 @@
             <a:r>
               <a:rPr sz="1019" b="1">
                 <a:solidFill>
-                  <a:srgbClr val="1F4E8C"/>
+                  <a:srgbClr val="1E6B4F"/>
                 </a:solidFill>
                 <a:latin typeface="Pretendard"/>
                 <a:ea typeface="Pretendard"/>
@@ -19528,7 +19528,7 @@
           </a:prstGeom>
           <a:ln w="16764">
             <a:solidFill>
-              <a:srgbClr val="1F4E8C"/>
+              <a:srgbClr val="1E6B4F"/>
             </a:solidFill>
             <a:tailEnd type="triangle" w="med" len="med"/>
           </a:ln>
@@ -19562,7 +19562,7 @@
             <a:r>
               <a:rPr sz="1019" b="1">
                 <a:solidFill>
-                  <a:srgbClr val="1F4E8C"/>
+                  <a:srgbClr val="1E6B4F"/>
                 </a:solidFill>
                 <a:latin typeface="Pretendard"/>
                 <a:ea typeface="Pretendard"/>
@@ -19592,7 +19592,7 @@
           </a:prstGeom>
           <a:ln w="16764">
             <a:solidFill>
-              <a:srgbClr val="1F4E8C"/>
+              <a:srgbClr val="1E6B4F"/>
             </a:solidFill>
             <a:tailEnd type="triangle" w="med" len="med"/>
           </a:ln>
@@ -19616,7 +19616,7 @@
           </a:prstGeom>
           <a:ln w="16764">
             <a:solidFill>
-              <a:srgbClr val="1F4E8C"/>
+              <a:srgbClr val="1E6B4F"/>
             </a:solidFill>
             <a:tailEnd type="triangle" w="med" len="med"/>
           </a:ln>
@@ -19650,7 +19650,7 @@
             <a:r>
               <a:rPr sz="1019" b="1">
                 <a:solidFill>
-                  <a:srgbClr val="1F4E8C"/>
+                  <a:srgbClr val="1E6B4F"/>
                 </a:solidFill>
                 <a:latin typeface="Pretendard"/>
                 <a:ea typeface="Pretendard"/>
@@ -19680,7 +19680,7 @@
           </a:prstGeom>
           <a:ln w="16764">
             <a:solidFill>
-              <a:srgbClr val="2B86C9"/>
+              <a:srgbClr val="2E9E6E"/>
             </a:solidFill>
             <a:prstDash val="dash"/>
             <a:tailEnd type="triangle" w="med" len="med"/>
@@ -19706,7 +19706,7 @@
           </a:prstGeom>
           <a:ln w="16764">
             <a:solidFill>
-              <a:srgbClr val="2B86C9"/>
+              <a:srgbClr val="2E9E6E"/>
             </a:solidFill>
             <a:prstDash val="dash"/>
             <a:tailEnd type="triangle" w="med" len="med"/>
@@ -19741,7 +19741,7 @@
             <a:r>
               <a:rPr sz="1019" b="1">
                 <a:solidFill>
-                  <a:srgbClr val="2B86C9"/>
+                  <a:srgbClr val="2E9E6E"/>
                 </a:solidFill>
                 <a:latin typeface="Pretendard"/>
                 <a:ea typeface="Pretendard"/>
@@ -19771,7 +19771,7 @@
           </a:prstGeom>
           <a:ln w="16764">
             <a:solidFill>
-              <a:srgbClr val="2B86C9"/>
+              <a:srgbClr val="2E9E6E"/>
             </a:solidFill>
             <a:prstDash val="dash"/>
             <a:tailEnd type="triangle" w="med" len="med"/>
@@ -19797,7 +19797,7 @@
           </a:prstGeom>
           <a:ln w="16764">
             <a:solidFill>
-              <a:srgbClr val="2B86C9"/>
+              <a:srgbClr val="2E9E6E"/>
             </a:solidFill>
             <a:prstDash val="dash"/>
             <a:tailEnd type="triangle" w="med" len="med"/>
@@ -19822,7 +19822,7 @@
           </a:prstGeom>
           <a:ln w="16764">
             <a:solidFill>
-              <a:srgbClr val="2B86C9"/>
+              <a:srgbClr val="2E9E6E"/>
             </a:solidFill>
             <a:prstDash val="dash"/>
             <a:tailEnd type="triangle" w="med" len="med"/>
@@ -19857,7 +19857,7 @@
             <a:r>
               <a:rPr sz="1019" b="1">
                 <a:solidFill>
-                  <a:srgbClr val="2B86C9"/>
+                  <a:srgbClr val="2E9E6E"/>
                 </a:solidFill>
                 <a:latin typeface="Pretendard"/>
                 <a:ea typeface="Pretendard"/>
@@ -19887,7 +19887,7 @@
           </a:prstGeom>
           <a:ln w="16764">
             <a:solidFill>
-              <a:srgbClr val="1F4E8C"/>
+              <a:srgbClr val="1E6B4F"/>
             </a:solidFill>
             <a:tailEnd type="triangle" w="med" len="med"/>
           </a:ln>
@@ -19921,7 +19921,7 @@
             <a:r>
               <a:rPr sz="1019" b="1">
                 <a:solidFill>
-                  <a:srgbClr val="1F4E8C"/>
+                  <a:srgbClr val="1E6B4F"/>
                 </a:solidFill>
                 <a:latin typeface="Pretendard"/>
                 <a:ea typeface="Pretendard"/>
@@ -19953,7 +19953,7 @@
           </a:solidFill>
           <a:ln w="10668">
             <a:solidFill>
-              <a:srgbClr val="8EC3EC"/>
+              <a:srgbClr val="9DD3B8"/>
             </a:solidFill>
           </a:ln>
         </p:spPr>
@@ -19991,7 +19991,7 @@
             <a:r>
               <a:rPr sz="1019" b="1">
                 <a:solidFill>
-                  <a:srgbClr val="0B2545"/>
+                  <a:srgbClr val="0B3D2E"/>
                 </a:solidFill>
                 <a:latin typeface="Pretendard"/>
                 <a:ea typeface="Pretendard"/>
@@ -20018,7 +20018,7 @@
           </a:prstGeom>
           <a:ln w="16764">
             <a:solidFill>
-              <a:srgbClr val="1F4E8C"/>
+              <a:srgbClr val="1E6B4F"/>
             </a:solidFill>
             <a:tailEnd type="triangle" w="med" len="med"/>
           </a:ln>
@@ -20077,7 +20077,7 @@
           </a:prstGeom>
           <a:ln w="16764">
             <a:solidFill>
-              <a:srgbClr val="2B86C9"/>
+              <a:srgbClr val="2E9E6E"/>
             </a:solidFill>
             <a:prstDash val="dash"/>
             <a:tailEnd type="triangle" w="med" len="med"/>

--- a/docs/design/dist/d01-system-architecture.pptx
+++ b/docs/design/dist/d01-system-architecture.pptx
@@ -3104,8 +3104,8 @@
         </p:nvSpPr>
         <p:spPr>
           <a:xfrm>
-            <a:off x="381000" y="289560"/>
-            <a:ext cx="53340" cy="335280"/>
+            <a:off x="381000" y="274320"/>
+            <a:ext cx="53340" cy="548640"/>
           </a:xfrm>
           <a:prstGeom prst="roundRect">
             <a:avLst>
@@ -3113,7 +3113,7 @@
             </a:avLst>
           </a:prstGeom>
           <a:solidFill>
-            <a:srgbClr val="164B8C"/>
+            <a:srgbClr val="1E6B4F"/>
           </a:solidFill>
           <a:ln>
             <a:noFill/>
@@ -3135,8 +3135,8 @@
         </p:nvSpPr>
         <p:spPr>
           <a:xfrm>
-            <a:off x="533400" y="289560"/>
-            <a:ext cx="7620000" cy="304800"/>
+            <a:off x="533400" y="228600"/>
+            <a:ext cx="8001000" cy="365760"/>
           </a:xfrm>
           <a:prstGeom prst="rect">
             <a:avLst/>
@@ -3151,9 +3151,9 @@
           <a:p>
             <a:pPr algn="l"/>
             <a:r>
-              <a:rPr sz="1800" b="1">
+              <a:rPr sz="2160" b="1">
                 <a:solidFill>
-                  <a:srgbClr val="0A2342"/>
+                  <a:srgbClr val="0B3D2E"/>
                 </a:solidFill>
                 <a:latin typeface="Pretendard"/>
                 <a:ea typeface="Pretendard"/>
@@ -3172,8 +3172,8 @@
         </p:nvSpPr>
         <p:spPr>
           <a:xfrm>
-            <a:off x="533400" y="624840"/>
-            <a:ext cx="7620000" cy="167640"/>
+            <a:off x="533400" y="640080"/>
+            <a:ext cx="9144000" cy="182880"/>
           </a:xfrm>
           <a:prstGeom prst="rect">
             <a:avLst/>
@@ -3188,7 +3188,7 @@
           <a:p>
             <a:pPr algn="l"/>
             <a:r>
-              <a:rPr sz="960" b="0">
+              <a:rPr sz="1080" b="0">
                 <a:solidFill>
                   <a:srgbClr val="3F4E61"/>
                 </a:solidFill>
@@ -3209,8 +3209,8 @@
         </p:nvSpPr>
         <p:spPr>
           <a:xfrm>
-            <a:off x="8763000" y="426720"/>
-            <a:ext cx="3048000" cy="152400"/>
+            <a:off x="8382000" y="411480"/>
+            <a:ext cx="3429000" cy="167640"/>
           </a:xfrm>
           <a:prstGeom prst="rect">
             <a:avLst/>
@@ -3225,7 +3225,7 @@
           <a:p>
             <a:pPr algn="r"/>
             <a:r>
-              <a:rPr sz="840" b="0">
+              <a:rPr sz="1019" b="0">
                 <a:solidFill>
                   <a:srgbClr val="3F4E61"/>
                 </a:solidFill>
@@ -3233,7 +3233,7 @@
                 <a:ea typeface="Pretendard"/>
                 <a:cs typeface="Pretendard"/>
               </a:rPr>
-              <a:t>KDMS-D01 · v0.2 · 2026-10-06</a:t>
+              <a:t>KDMS-D01 · v0.3 · 2026-10-09</a:t>
             </a:r>
           </a:p>
         </p:txBody>
@@ -3255,11 +3255,11 @@
             </a:avLst>
           </a:prstGeom>
           <a:solidFill>
-            <a:srgbClr val="F1F6FC"/>
+            <a:srgbClr val="EEF8F3"/>
           </a:solidFill>
           <a:ln w="10668">
             <a:solidFill>
-              <a:srgbClr val="A9C3E2"/>
+              <a:srgbClr val="9DD3B8"/>
             </a:solidFill>
           </a:ln>
         </p:spPr>
@@ -3277,7 +3277,7 @@
             <a:r>
               <a:rPr sz="1200" b="1">
                 <a:solidFill>
-                  <a:srgbClr val="0A2342"/>
+                  <a:srgbClr val="0B3D2E"/>
                 </a:solidFill>
                 <a:latin typeface="Pretendard"/>
                 <a:ea typeface="Pretendard"/>
@@ -3289,11 +3289,11 @@
           <a:p>
             <a:pPr algn="l">
               <a:lnSpc>
-                <a:spcPts val="1200"/>
+                <a:spcPts val="1320"/>
               </a:lnSpc>
             </a:pPr>
             <a:r>
-              <a:rPr sz="869" b="0">
+              <a:rPr sz="1019" b="0">
                 <a:solidFill>
                   <a:srgbClr val="3F4E61"/>
                 </a:solidFill>
@@ -3323,11 +3323,11 @@
             </a:avLst>
           </a:prstGeom>
           <a:solidFill>
-            <a:srgbClr val="E8F1FB"/>
+            <a:srgbClr val="EEF8F3"/>
           </a:solidFill>
           <a:ln w="15240">
             <a:solidFill>
-              <a:srgbClr val="164B8C"/>
+              <a:srgbClr val="1E6B4F"/>
             </a:solidFill>
           </a:ln>
         </p:spPr>
@@ -3345,7 +3345,7 @@
             <a:r>
               <a:rPr sz="1200" b="1">
                 <a:solidFill>
-                  <a:srgbClr val="0A2342"/>
+                  <a:srgbClr val="0B3D2E"/>
                 </a:solidFill>
                 <a:latin typeface="Pretendard"/>
                 <a:ea typeface="Pretendard"/>
@@ -3357,11 +3357,11 @@
           <a:p>
             <a:pPr algn="r">
               <a:lnSpc>
-                <a:spcPts val="1200"/>
+                <a:spcPts val="1320"/>
               </a:lnSpc>
             </a:pPr>
             <a:r>
-              <a:rPr sz="869" b="0">
+              <a:rPr sz="1019" b="0">
                 <a:solidFill>
                   <a:srgbClr val="3F4E61"/>
                 </a:solidFill>
@@ -3391,11 +3391,11 @@
             </a:avLst>
           </a:prstGeom>
           <a:solidFill>
-            <a:srgbClr val="F1F6FC"/>
+            <a:srgbClr val="EEF8F3"/>
           </a:solidFill>
           <a:ln w="10668">
             <a:solidFill>
-              <a:srgbClr val="A9C3E2"/>
+              <a:srgbClr val="9DD3B8"/>
             </a:solidFill>
           </a:ln>
         </p:spPr>
@@ -3413,7 +3413,7 @@
             <a:r>
               <a:rPr sz="1200" b="1">
                 <a:solidFill>
-                  <a:srgbClr val="0A2342"/>
+                  <a:srgbClr val="0B3D2E"/>
                 </a:solidFill>
                 <a:latin typeface="Pretendard"/>
                 <a:ea typeface="Pretendard"/>
@@ -3425,11 +3425,11 @@
           <a:p>
             <a:pPr algn="l">
               <a:lnSpc>
-                <a:spcPts val="1200"/>
+                <a:spcPts val="1320"/>
               </a:lnSpc>
             </a:pPr>
             <a:r>
-              <a:rPr sz="869" b="0">
+              <a:rPr sz="1019" b="0">
                 <a:solidFill>
                   <a:srgbClr val="3F4E61"/>
                 </a:solidFill>
@@ -3450,8 +3450,8 @@
         </p:nvSpPr>
         <p:spPr>
           <a:xfrm>
-            <a:off x="3429000" y="822960"/>
-            <a:ext cx="3299460" cy="365760"/>
+            <a:off x="3429000" y="929640"/>
+            <a:ext cx="3299460" cy="350520"/>
           </a:xfrm>
           <a:prstGeom prst="roundRect">
             <a:avLst>
@@ -3463,21 +3463,21 @@
           </a:solidFill>
           <a:ln w="15240">
             <a:solidFill>
-              <a:srgbClr val="164B8C"/>
+              <a:srgbClr val="1E6B4F"/>
             </a:solidFill>
           </a:ln>
         </p:spPr>
         <p:txBody>
-          <a:bodyPr rtlCol="0" anchor="ctr" lIns="925449" tIns="0" rIns="0" bIns="0" wrap="none">
+          <a:bodyPr rtlCol="0" anchor="ctr" lIns="874776" tIns="0" rIns="0" bIns="0" wrap="none">
             <a:noAutofit/>
           </a:bodyPr>
           <a:lstStyle/>
           <a:p>
             <a:pPr algn="l"/>
             <a:r>
-              <a:rPr sz="1019" b="1">
+              <a:rPr sz="1080" b="1">
                 <a:solidFill>
-                  <a:srgbClr val="0A2342"/>
+                  <a:srgbClr val="0B3D2E"/>
                 </a:solidFill>
                 <a:latin typeface="Pretendard"/>
                 <a:ea typeface="Pretendard"/>
@@ -3496,7 +3496,7 @@
         </p:nvSpPr>
         <p:spPr>
           <a:xfrm>
-            <a:off x="4113149" y="943721"/>
+            <a:off x="4062476" y="1042781"/>
             <a:ext cx="132080" cy="128159"/>
           </a:xfrm>
           <a:custGeom>
@@ -3598,7 +3598,7 @@
                   <a:pt x="51835" y="2950"/>
                 </a:lnTo>
                 <a:lnTo>
-                  <a:pt x="53658" y="2167"/>
+                  <a:pt x="53657" y="2167"/>
                 </a:lnTo>
                 <a:lnTo>
                   <a:pt x="55549" y="1505"/>
@@ -3634,7 +3634,7 @@
                   <a:pt x="76531" y="1505"/>
                 </a:lnTo>
                 <a:lnTo>
-                  <a:pt x="78423" y="2167"/>
+                  <a:pt x="78422" y="2167"/>
                 </a:lnTo>
                 <a:lnTo>
                   <a:pt x="80245" y="2950"/>
@@ -3652,7 +3652,7 @@
                   <a:pt x="86849" y="7283"/>
                 </a:lnTo>
                 <a:lnTo>
-                  <a:pt x="88329" y="8668"/>
+                  <a:pt x="88328" y="8668"/>
                 </a:lnTo>
                 <a:lnTo>
                   <a:pt x="89713" y="10147"/>
@@ -3724,7 +3724,7 @@
                   <a:pt x="89713" y="51766"/>
                 </a:lnTo>
                 <a:lnTo>
-                  <a:pt x="88329" y="53245"/>
+                  <a:pt x="88328" y="53245"/>
                 </a:lnTo>
                 <a:lnTo>
                   <a:pt x="86849" y="54629"/>
@@ -3742,7 +3742,7 @@
                   <a:pt x="80245" y="58963"/>
                 </a:lnTo>
                 <a:lnTo>
-                  <a:pt x="78423" y="59746"/>
+                  <a:pt x="78422" y="59746"/>
                 </a:lnTo>
                 <a:lnTo>
                   <a:pt x="76531" y="60408"/>
@@ -3778,7 +3778,7 @@
                   <a:pt x="55549" y="60408"/>
                 </a:lnTo>
                 <a:lnTo>
-                  <a:pt x="53658" y="59746"/>
+                  <a:pt x="53657" y="59746"/>
                 </a:lnTo>
                 <a:lnTo>
                   <a:pt x="51835" y="58963"/>
@@ -4101,7 +4101,7 @@
                 </a:lnTo>
                 <a:close/>
                 <a:moveTo>
-                  <a:pt x="12383" y="115777"/>
+                  <a:pt x="12382" y="115777"/>
                 </a:moveTo>
                 <a:lnTo>
                   <a:pt x="119697" y="115777"/>
@@ -4299,7 +4299,7 @@
                   <a:pt x="37444" y="90695"/>
                 </a:lnTo>
                 <a:lnTo>
-                  <a:pt x="35497" y="91287"/>
+                  <a:pt x="35496" y="91287"/>
                 </a:lnTo>
                 <a:lnTo>
                   <a:pt x="33523" y="91934"/>
@@ -4323,7 +4323,7 @@
                   <a:pt x="21141" y="96990"/>
                 </a:lnTo>
                 <a:lnTo>
-                  <a:pt x="18987" y="98028"/>
+                  <a:pt x="18986" y="98028"/>
                 </a:lnTo>
                 <a:lnTo>
                   <a:pt x="18512" y="98280"/>
@@ -4395,10 +4395,10 @@
                   <a:pt x="12395" y="108212"/>
                 </a:lnTo>
                 <a:lnTo>
-                  <a:pt x="12383" y="108760"/>
-                </a:lnTo>
-                <a:lnTo>
-                  <a:pt x="12383" y="115777"/>
+                  <a:pt x="12382" y="108760"/>
+                </a:lnTo>
+                <a:lnTo>
+                  <a:pt x="12382" y="115777"/>
                 </a:lnTo>
                 <a:close/>
                 <a:moveTo>
@@ -4697,7 +4697,7 @@
             </a:pathLst>
           </a:custGeom>
           <a:solidFill>
-            <a:srgbClr val="164B8C"/>
+            <a:srgbClr val="1E6B4F"/>
           </a:solidFill>
           <a:ln>
             <a:noFill/>
@@ -4730,27 +4730,27 @@
           <a:solidFill>
             <a:srgbClr val="FFFFFF"/>
           </a:solidFill>
-          <a:ln w="12192">
+          <a:ln w="13716">
             <a:solidFill>
-              <a:srgbClr val="6F9BD1"/>
+              <a:srgbClr val="9DD3B8"/>
             </a:solidFill>
           </a:ln>
         </p:spPr>
         <p:txBody>
-          <a:bodyPr rtlCol="0" anchor="t" lIns="45720" tIns="377190" rIns="45720" bIns="0" wrap="none">
+          <a:bodyPr rtlCol="0" anchor="t" lIns="45720" tIns="358140" rIns="45720" bIns="0" wrap="none">
             <a:noAutofit/>
           </a:bodyPr>
           <a:lstStyle/>
           <a:p>
             <a:pPr algn="ctr">
               <a:lnSpc>
-                <a:spcPts val="1439"/>
+                <a:spcPts val="1560"/>
               </a:lnSpc>
             </a:pPr>
             <a:r>
-              <a:rPr sz="1140" b="1">
+              <a:rPr sz="1200" b="1">
                 <a:solidFill>
-                  <a:srgbClr val="0A2342"/>
+                  <a:srgbClr val="0B3D2E"/>
                 </a:solidFill>
                 <a:latin typeface="Pretendard"/>
                 <a:ea typeface="Pretendard"/>
@@ -4762,11 +4762,11 @@
           <a:p>
             <a:pPr algn="ctr">
               <a:lnSpc>
-                <a:spcPts val="1140"/>
+                <a:spcPts val="1320"/>
               </a:lnSpc>
             </a:pPr>
             <a:r>
-              <a:rPr sz="869" b="0">
+              <a:rPr sz="1019" b="0">
                 <a:solidFill>
                   <a:srgbClr val="3F4E61"/>
                 </a:solidFill>
@@ -4787,7 +4787,7 @@
         </p:nvSpPr>
         <p:spPr>
           <a:xfrm>
-            <a:off x="3934460" y="1967230"/>
+            <a:off x="3934460" y="1948180"/>
             <a:ext cx="254000" cy="203200"/>
           </a:xfrm>
           <a:custGeom>
@@ -5154,7 +5154,7 @@
             </a:pathLst>
           </a:custGeom>
           <a:solidFill>
-            <a:srgbClr val="164B8C"/>
+            <a:srgbClr val="1E6B4F"/>
           </a:solidFill>
           <a:ln>
             <a:noFill/>
@@ -5187,27 +5187,27 @@
           <a:solidFill>
             <a:srgbClr val="FFFFFF"/>
           </a:solidFill>
-          <a:ln w="12192">
+          <a:ln w="13716">
             <a:solidFill>
-              <a:srgbClr val="6F9BD1"/>
+              <a:srgbClr val="9DD3B8"/>
             </a:solidFill>
           </a:ln>
         </p:spPr>
         <p:txBody>
-          <a:bodyPr rtlCol="0" anchor="t" lIns="45720" tIns="377190" rIns="45720" bIns="0" wrap="none">
+          <a:bodyPr rtlCol="0" anchor="t" lIns="45720" tIns="358140" rIns="45720" bIns="0" wrap="none">
             <a:noAutofit/>
           </a:bodyPr>
           <a:lstStyle/>
           <a:p>
             <a:pPr algn="ctr">
               <a:lnSpc>
-                <a:spcPts val="1439"/>
+                <a:spcPts val="1560"/>
               </a:lnSpc>
             </a:pPr>
             <a:r>
-              <a:rPr sz="1140" b="1">
+              <a:rPr sz="1200" b="1">
                 <a:solidFill>
-                  <a:srgbClr val="0A2342"/>
+                  <a:srgbClr val="0B3D2E"/>
                 </a:solidFill>
                 <a:latin typeface="Pretendard"/>
                 <a:ea typeface="Pretendard"/>
@@ -5219,11 +5219,11 @@
           <a:p>
             <a:pPr algn="ctr">
               <a:lnSpc>
-                <a:spcPts val="1140"/>
+                <a:spcPts val="1320"/>
               </a:lnSpc>
             </a:pPr>
             <a:r>
-              <a:rPr sz="869" b="0">
+              <a:rPr sz="1019" b="0">
                 <a:solidFill>
                   <a:srgbClr val="3F4E61"/>
                 </a:solidFill>
@@ -5231,7 +5231,7 @@
                 <a:ea typeface="Pretendard"/>
                 <a:cs typeface="Pretendard"/>
               </a:rPr>
-              <a:t>plan · load · sync · cutover</a:t>
+              <a:t>load · sync · cutover 등</a:t>
             </a:r>
           </a:p>
         </p:txBody>
@@ -5244,7 +5244,7 @@
         </p:nvSpPr>
         <p:spPr>
           <a:xfrm>
-            <a:off x="5969000" y="1967230"/>
+            <a:off x="5969000" y="1948180"/>
             <a:ext cx="254000" cy="203200"/>
           </a:xfrm>
           <a:custGeom>
@@ -5617,7 +5617,7 @@
             </a:pathLst>
           </a:custGeom>
           <a:solidFill>
-            <a:srgbClr val="164B8C"/>
+            <a:srgbClr val="1E6B4F"/>
           </a:solidFill>
           <a:ln>
             <a:noFill/>
@@ -5650,27 +5650,27 @@
           <a:solidFill>
             <a:srgbClr val="FFFFFF"/>
           </a:solidFill>
-          <a:ln w="12192">
+          <a:ln w="13716">
             <a:solidFill>
-              <a:srgbClr val="6F9BD1"/>
+              <a:srgbClr val="9DD3B8"/>
             </a:solidFill>
           </a:ln>
         </p:spPr>
         <p:txBody>
-          <a:bodyPr rtlCol="0" anchor="t" lIns="45720" tIns="377190" rIns="45720" bIns="0" wrap="none">
+          <a:bodyPr rtlCol="0" anchor="t" lIns="45720" tIns="358140" rIns="45720" bIns="0" wrap="none">
             <a:noAutofit/>
           </a:bodyPr>
           <a:lstStyle/>
           <a:p>
             <a:pPr algn="ctr">
               <a:lnSpc>
-                <a:spcPts val="1439"/>
+                <a:spcPts val="1560"/>
               </a:lnSpc>
             </a:pPr>
             <a:r>
-              <a:rPr sz="1140" b="1">
+              <a:rPr sz="1200" b="1">
                 <a:solidFill>
-                  <a:srgbClr val="0A2342"/>
+                  <a:srgbClr val="0B3D2E"/>
                 </a:solidFill>
                 <a:latin typeface="Pretendard"/>
                 <a:ea typeface="Pretendard"/>
@@ -5682,11 +5682,11 @@
           <a:p>
             <a:pPr algn="ctr">
               <a:lnSpc>
-                <a:spcPts val="1140"/>
+                <a:spcPts val="1320"/>
               </a:lnSpc>
             </a:pPr>
             <a:r>
-              <a:rPr sz="869" b="0">
+              <a:rPr sz="1019" b="0">
                 <a:solidFill>
                   <a:srgbClr val="3F4E61"/>
                 </a:solidFill>
@@ -5694,7 +5694,7 @@
                 <a:ea typeface="Pretendard"/>
                 <a:cs typeface="Pretendard"/>
               </a:rPr>
-              <a:t>kdms.yml · kdms-rules.yml</a:t>
+              <a:t>kdms.yml · 규칙 파일</a:t>
             </a:r>
           </a:p>
         </p:txBody>
@@ -5707,7 +5707,7 @@
         </p:nvSpPr>
         <p:spPr>
           <a:xfrm>
-            <a:off x="8018780" y="1967230"/>
+            <a:off x="8018780" y="1948180"/>
             <a:ext cx="249555" cy="241300"/>
           </a:xfrm>
           <a:custGeom>
@@ -6378,7 +6378,7 @@
                   <a:pt x="141605" y="138748"/>
                 </a:lnTo>
                 <a:lnTo>
-                  <a:pt x="154940" y="145098"/>
+                  <a:pt x="154940" y="145097"/>
                 </a:lnTo>
                 <a:lnTo>
                   <a:pt x="155646" y="144462"/>
@@ -6393,10 +6393,10 @@
                   <a:pt x="157974" y="142558"/>
                 </a:lnTo>
                 <a:lnTo>
-                  <a:pt x="158821" y="141922"/>
-                </a:lnTo>
-                <a:lnTo>
-                  <a:pt x="159703" y="141288"/>
+                  <a:pt x="158821" y="141923"/>
+                </a:lnTo>
+                <a:lnTo>
+                  <a:pt x="159703" y="141287"/>
                 </a:lnTo>
                 <a:lnTo>
                   <a:pt x="160620" y="140652"/>
@@ -6411,10 +6411,10 @@
                   <a:pt x="163583" y="138748"/>
                 </a:lnTo>
                 <a:lnTo>
-                  <a:pt x="164641" y="138112"/>
-                </a:lnTo>
-                <a:lnTo>
-                  <a:pt x="165735" y="137478"/>
+                  <a:pt x="164641" y="138113"/>
+                </a:lnTo>
+                <a:lnTo>
+                  <a:pt x="165735" y="137477"/>
                 </a:lnTo>
                 <a:lnTo>
                   <a:pt x="166844" y="136856"/>
@@ -6495,10 +6495,10 @@
                   <a:pt x="213203" y="136856"/>
                 </a:lnTo>
                 <a:lnTo>
-                  <a:pt x="214312" y="137478"/>
-                </a:lnTo>
-                <a:lnTo>
-                  <a:pt x="215406" y="138112"/>
+                  <a:pt x="214312" y="137477"/>
+                </a:lnTo>
+                <a:lnTo>
+                  <a:pt x="215406" y="138113"/>
                 </a:lnTo>
                 <a:lnTo>
                   <a:pt x="216464" y="138748"/>
@@ -6513,10 +6513,10 @@
                   <a:pt x="219428" y="140652"/>
                 </a:lnTo>
                 <a:lnTo>
-                  <a:pt x="220345" y="141288"/>
-                </a:lnTo>
-                <a:lnTo>
-                  <a:pt x="221227" y="141922"/>
+                  <a:pt x="220345" y="141287"/>
+                </a:lnTo>
+                <a:lnTo>
+                  <a:pt x="221227" y="141923"/>
                 </a:lnTo>
                 <a:lnTo>
                   <a:pt x="222074" y="142558"/>
@@ -6531,7 +6531,7 @@
                   <a:pt x="224402" y="144462"/>
                 </a:lnTo>
                 <a:lnTo>
-                  <a:pt x="225108" y="145098"/>
+                  <a:pt x="225108" y="145097"/>
                 </a:lnTo>
                 <a:lnTo>
                   <a:pt x="238442" y="138748"/>
@@ -6998,7 +6998,7 @@
             </a:pathLst>
           </a:custGeom>
           <a:solidFill>
-            <a:srgbClr val="164B8C"/>
+            <a:srgbClr val="1E6B4F"/>
           </a:solidFill>
           <a:ln>
             <a:noFill/>
@@ -7031,27 +7031,27 @@
           <a:solidFill>
             <a:srgbClr val="FFFFFF"/>
           </a:solidFill>
-          <a:ln w="12192">
+          <a:ln w="13716">
             <a:solidFill>
-              <a:srgbClr val="6F9BD1"/>
+              <a:srgbClr val="9DD3B8"/>
             </a:solidFill>
           </a:ln>
         </p:spPr>
         <p:txBody>
-          <a:bodyPr rtlCol="0" anchor="t" lIns="45720" tIns="461010" rIns="45720" bIns="0" wrap="none">
+          <a:bodyPr rtlCol="0" anchor="t" lIns="45720" tIns="441960" rIns="45720" bIns="0" wrap="none">
             <a:noAutofit/>
           </a:bodyPr>
           <a:lstStyle/>
           <a:p>
             <a:pPr algn="ctr">
               <a:lnSpc>
-                <a:spcPts val="1439"/>
+                <a:spcPts val="1560"/>
               </a:lnSpc>
             </a:pPr>
             <a:r>
-              <a:rPr sz="1140" b="1">
+              <a:rPr sz="1200" b="1">
                 <a:solidFill>
-                  <a:srgbClr val="0A2342"/>
+                  <a:srgbClr val="0B3D2E"/>
                 </a:solidFill>
                 <a:latin typeface="Pretendard"/>
                 <a:ea typeface="Pretendard"/>
@@ -7063,11 +7063,11 @@
           <a:p>
             <a:pPr algn="ctr">
               <a:lnSpc>
-                <a:spcPts val="1140"/>
+                <a:spcPts val="1320"/>
               </a:lnSpc>
             </a:pPr>
             <a:r>
-              <a:rPr sz="869" b="0">
+              <a:rPr sz="1019" b="0">
                 <a:solidFill>
                   <a:srgbClr val="3F4E61"/>
                 </a:solidFill>
@@ -7088,7 +7088,7 @@
         </p:nvSpPr>
         <p:spPr>
           <a:xfrm>
-            <a:off x="4394200" y="2881630"/>
+            <a:off x="4394200" y="2862580"/>
             <a:ext cx="215900" cy="279400"/>
           </a:xfrm>
           <a:custGeom>
@@ -7255,7 +7255,7 @@
             </a:pathLst>
           </a:custGeom>
           <a:solidFill>
-            <a:srgbClr val="164B8C"/>
+            <a:srgbClr val="1E6B4F"/>
           </a:solidFill>
           <a:ln>
             <a:noFill/>
@@ -7278,13 +7278,13 @@
         <p:spPr>
           <a:xfrm>
             <a:off x="3177540" y="2811780"/>
-            <a:ext cx="198120" cy="198120"/>
+            <a:ext cx="213360" cy="213360"/>
           </a:xfrm>
           <a:prstGeom prst="ellipse">
             <a:avLst/>
           </a:prstGeom>
           <a:solidFill>
-            <a:srgbClr val="164B8C"/>
+            <a:srgbClr val="1E6B4F"/>
           </a:solidFill>
           <a:ln>
             <a:noFill/>
@@ -7298,7 +7298,7 @@
           <a:p>
             <a:pPr algn="ctr"/>
             <a:r>
-              <a:rPr sz="900" b="1">
+              <a:rPr sz="1019" b="1">
                 <a:solidFill>
                   <a:srgbClr val="FFFFFF"/>
                 </a:solidFill>
@@ -7330,27 +7330,27 @@
           <a:solidFill>
             <a:srgbClr val="FFFFFF"/>
           </a:solidFill>
-          <a:ln w="12192">
+          <a:ln w="13716">
             <a:solidFill>
-              <a:srgbClr val="6F9BD1"/>
+              <a:srgbClr val="9DD3B8"/>
             </a:solidFill>
           </a:ln>
         </p:spPr>
         <p:txBody>
-          <a:bodyPr rtlCol="0" anchor="t" lIns="45720" tIns="461010" rIns="45720" bIns="0" wrap="none">
+          <a:bodyPr rtlCol="0" anchor="t" lIns="45720" tIns="441960" rIns="45720" bIns="0" wrap="none">
             <a:noAutofit/>
           </a:bodyPr>
           <a:lstStyle/>
           <a:p>
             <a:pPr algn="ctr">
               <a:lnSpc>
-                <a:spcPts val="1439"/>
+                <a:spcPts val="1560"/>
               </a:lnSpc>
             </a:pPr>
             <a:r>
-              <a:rPr sz="1140" b="1">
+              <a:rPr sz="1200" b="1">
                 <a:solidFill>
-                  <a:srgbClr val="0A2342"/>
+                  <a:srgbClr val="0B3D2E"/>
                 </a:solidFill>
                 <a:latin typeface="Pretendard"/>
                 <a:ea typeface="Pretendard"/>
@@ -7362,11 +7362,11 @@
           <a:p>
             <a:pPr algn="ctr">
               <a:lnSpc>
-                <a:spcPts val="1140"/>
+                <a:spcPts val="1320"/>
               </a:lnSpc>
             </a:pPr>
             <a:r>
-              <a:rPr sz="869" b="0">
+              <a:rPr sz="1019" b="0">
                 <a:solidFill>
                   <a:srgbClr val="3F4E61"/>
                 </a:solidFill>
@@ -7387,7 +7387,7 @@
         </p:nvSpPr>
         <p:spPr>
           <a:xfrm>
-            <a:off x="7581900" y="2907030"/>
+            <a:off x="7581900" y="2887980"/>
             <a:ext cx="254000" cy="254000"/>
           </a:xfrm>
           <a:custGeom>
@@ -9643,7 +9643,7 @@
             </a:pathLst>
           </a:custGeom>
           <a:solidFill>
-            <a:srgbClr val="164B8C"/>
+            <a:srgbClr val="1E6B4F"/>
           </a:solidFill>
           <a:ln>
             <a:noFill/>
@@ -9666,13 +9666,13 @@
         <p:spPr>
           <a:xfrm>
             <a:off x="6377940" y="2811780"/>
-            <a:ext cx="198120" cy="198120"/>
+            <a:ext cx="213360" cy="213360"/>
           </a:xfrm>
           <a:prstGeom prst="ellipse">
             <a:avLst/>
           </a:prstGeom>
           <a:solidFill>
-            <a:srgbClr val="164B8C"/>
+            <a:srgbClr val="1E6B4F"/>
           </a:solidFill>
           <a:ln>
             <a:noFill/>
@@ -9686,7 +9686,7 @@
           <a:p>
             <a:pPr algn="ctr"/>
             <a:r>
-              <a:rPr sz="900" b="1">
+              <a:rPr sz="1019" b="1">
                 <a:solidFill>
                   <a:srgbClr val="FFFFFF"/>
                 </a:solidFill>
@@ -9716,29 +9716,29 @@
             </a:avLst>
           </a:prstGeom>
           <a:solidFill>
-            <a:srgbClr val="D3E5F8"/>
+            <a:srgbClr val="0B3D2E"/>
           </a:solidFill>
           <a:ln w="18288">
             <a:solidFill>
-              <a:srgbClr val="0F3C78"/>
+              <a:srgbClr val="0B3D2E"/>
             </a:solidFill>
           </a:ln>
         </p:spPr>
         <p:txBody>
-          <a:bodyPr rtlCol="0" anchor="t" lIns="45720" tIns="461010" rIns="45720" bIns="0" wrap="none">
+          <a:bodyPr rtlCol="0" anchor="t" lIns="45720" tIns="441960" rIns="45720" bIns="0" wrap="none">
             <a:noAutofit/>
           </a:bodyPr>
           <a:lstStyle/>
           <a:p>
             <a:pPr algn="ctr">
               <a:lnSpc>
-                <a:spcPts val="1439"/>
+                <a:spcPts val="1560"/>
               </a:lnSpc>
             </a:pPr>
             <a:r>
-              <a:rPr sz="1140" b="1">
+              <a:rPr sz="1200" b="1">
                 <a:solidFill>
-                  <a:srgbClr val="0A2342"/>
+                  <a:srgbClr val="FFFFFF"/>
                 </a:solidFill>
                 <a:latin typeface="Pretendard"/>
                 <a:ea typeface="Pretendard"/>
@@ -9750,13 +9750,13 @@
           <a:p>
             <a:pPr algn="ctr">
               <a:lnSpc>
-                <a:spcPts val="1140"/>
+                <a:spcPts val="1320"/>
               </a:lnSpc>
             </a:pPr>
             <a:r>
-              <a:rPr sz="869" b="0">
+              <a:rPr sz="1019" b="0">
                 <a:solidFill>
-                  <a:srgbClr val="3F4E61"/>
+                  <a:srgbClr val="FFFFFF"/>
                 </a:solidFill>
                 <a:latin typeface="Pretendard"/>
                 <a:ea typeface="Pretendard"/>
@@ -9775,7 +9775,7 @@
         </p:nvSpPr>
         <p:spPr>
           <a:xfrm>
-            <a:off x="3883660" y="3956050"/>
+            <a:off x="3883660" y="3937000"/>
             <a:ext cx="203200" cy="203200"/>
           </a:xfrm>
           <a:custGeom>
@@ -10428,7 +10428,7 @@
             </a:pathLst>
           </a:custGeom>
           <a:solidFill>
-            <a:srgbClr val="164B8C"/>
+            <a:srgbClr val="FFFFFF"/>
           </a:solidFill>
           <a:ln>
             <a:noFill/>
@@ -10451,13 +10451,13 @@
         <p:spPr>
           <a:xfrm>
             <a:off x="3177540" y="3848100"/>
-            <a:ext cx="198120" cy="198120"/>
+            <a:ext cx="213360" cy="213360"/>
           </a:xfrm>
           <a:prstGeom prst="ellipse">
             <a:avLst/>
           </a:prstGeom>
           <a:solidFill>
-            <a:srgbClr val="164B8C"/>
+            <a:srgbClr val="FFFFFF"/>
           </a:solidFill>
           <a:ln>
             <a:noFill/>
@@ -10471,9 +10471,9 @@
           <a:p>
             <a:pPr algn="ctr"/>
             <a:r>
-              <a:rPr sz="900" b="1">
+              <a:rPr sz="1019" b="1">
                 <a:solidFill>
-                  <a:srgbClr val="FFFFFF"/>
+                  <a:srgbClr val="0B3D2E"/>
                 </a:solidFill>
                 <a:latin typeface="Pretendard"/>
                 <a:ea typeface="Pretendard"/>
@@ -10503,27 +10503,27 @@
           <a:solidFill>
             <a:srgbClr val="FFFFFF"/>
           </a:solidFill>
-          <a:ln w="12192">
+          <a:ln w="13716">
             <a:solidFill>
-              <a:srgbClr val="6F9BD1"/>
+              <a:srgbClr val="9DD3B8"/>
             </a:solidFill>
           </a:ln>
         </p:spPr>
         <p:txBody>
-          <a:bodyPr rtlCol="0" anchor="t" lIns="45720" tIns="461010" rIns="45720" bIns="0" wrap="none">
+          <a:bodyPr rtlCol="0" anchor="t" lIns="45720" tIns="441960" rIns="45720" bIns="0" wrap="none">
             <a:noAutofit/>
           </a:bodyPr>
           <a:lstStyle/>
           <a:p>
             <a:pPr algn="ctr">
               <a:lnSpc>
-                <a:spcPts val="1439"/>
+                <a:spcPts val="1560"/>
               </a:lnSpc>
             </a:pPr>
             <a:r>
-              <a:rPr sz="1140" b="1">
+              <a:rPr sz="1200" b="1">
                 <a:solidFill>
-                  <a:srgbClr val="0A2342"/>
+                  <a:srgbClr val="0B3D2E"/>
                 </a:solidFill>
                 <a:latin typeface="Pretendard"/>
                 <a:ea typeface="Pretendard"/>
@@ -10535,11 +10535,11 @@
           <a:p>
             <a:pPr algn="ctr">
               <a:lnSpc>
-                <a:spcPts val="1140"/>
+                <a:spcPts val="1320"/>
               </a:lnSpc>
             </a:pPr>
             <a:r>
-              <a:rPr sz="869" b="0">
+              <a:rPr sz="1019" b="0">
                 <a:solidFill>
                   <a:srgbClr val="3F4E61"/>
                 </a:solidFill>
@@ -10560,7 +10560,7 @@
         </p:nvSpPr>
         <p:spPr>
           <a:xfrm>
-            <a:off x="5980748" y="3930650"/>
+            <a:off x="5980748" y="3911600"/>
             <a:ext cx="230504" cy="254000"/>
           </a:xfrm>
           <a:custGeom>
@@ -11645,7 +11645,7 @@
             </a:pathLst>
           </a:custGeom>
           <a:solidFill>
-            <a:srgbClr val="164B8C"/>
+            <a:srgbClr val="1E6B4F"/>
           </a:solidFill>
           <a:ln>
             <a:noFill/>
@@ -11676,29 +11676,29 @@
             </a:avLst>
           </a:prstGeom>
           <a:solidFill>
-            <a:srgbClr val="D3E5F8"/>
+            <a:srgbClr val="0B3D2E"/>
           </a:solidFill>
           <a:ln w="18288">
             <a:solidFill>
-              <a:srgbClr val="0F3C78"/>
+              <a:srgbClr val="0B3D2E"/>
             </a:solidFill>
           </a:ln>
         </p:spPr>
         <p:txBody>
-          <a:bodyPr rtlCol="0" anchor="t" lIns="45720" tIns="461010" rIns="45720" bIns="0" wrap="none">
+          <a:bodyPr rtlCol="0" anchor="t" lIns="45720" tIns="441960" rIns="45720" bIns="0" wrap="none">
             <a:noAutofit/>
           </a:bodyPr>
           <a:lstStyle/>
           <a:p>
             <a:pPr algn="ctr">
               <a:lnSpc>
-                <a:spcPts val="1439"/>
+                <a:spcPts val="1560"/>
               </a:lnSpc>
             </a:pPr>
             <a:r>
-              <a:rPr sz="1140" b="1">
+              <a:rPr sz="1200" b="1">
                 <a:solidFill>
-                  <a:srgbClr val="0A2342"/>
+                  <a:srgbClr val="FFFFFF"/>
                 </a:solidFill>
                 <a:latin typeface="Pretendard"/>
                 <a:ea typeface="Pretendard"/>
@@ -11710,13 +11710,13 @@
           <a:p>
             <a:pPr algn="ctr">
               <a:lnSpc>
-                <a:spcPts val="1140"/>
+                <a:spcPts val="1320"/>
               </a:lnSpc>
             </a:pPr>
             <a:r>
-              <a:rPr sz="869" b="0">
+              <a:rPr sz="1019" b="0">
                 <a:solidFill>
-                  <a:srgbClr val="3F4E61"/>
+                  <a:srgbClr val="FFFFFF"/>
                 </a:solidFill>
                 <a:latin typeface="Pretendard"/>
                 <a:ea typeface="Pretendard"/>
@@ -11735,7 +11735,7 @@
         </p:nvSpPr>
         <p:spPr>
           <a:xfrm>
-            <a:off x="8082915" y="3931285"/>
+            <a:off x="8082915" y="3912235"/>
             <a:ext cx="247650" cy="252730"/>
           </a:xfrm>
           <a:custGeom>
@@ -12470,7 +12470,7 @@
             </a:pathLst>
           </a:custGeom>
           <a:solidFill>
-            <a:srgbClr val="164B8C"/>
+            <a:srgbClr val="FFFFFF"/>
           </a:solidFill>
           <a:ln>
             <a:noFill/>
@@ -12493,13 +12493,13 @@
         <p:spPr>
           <a:xfrm>
             <a:off x="7399020" y="3848100"/>
-            <a:ext cx="198120" cy="198120"/>
+            <a:ext cx="213360" cy="213360"/>
           </a:xfrm>
           <a:prstGeom prst="ellipse">
             <a:avLst/>
           </a:prstGeom>
           <a:solidFill>
-            <a:srgbClr val="164B8C"/>
+            <a:srgbClr val="FFFFFF"/>
           </a:solidFill>
           <a:ln>
             <a:noFill/>
@@ -12513,9 +12513,9 @@
           <a:p>
             <a:pPr algn="ctr"/>
             <a:r>
-              <a:rPr sz="900" b="1">
+              <a:rPr sz="1019" b="1">
                 <a:solidFill>
-                  <a:srgbClr val="FFFFFF"/>
+                  <a:srgbClr val="0B3D2E"/>
                 </a:solidFill>
                 <a:latin typeface="Pretendard"/>
                 <a:ea typeface="Pretendard"/>
@@ -12545,27 +12545,27 @@
           <a:solidFill>
             <a:srgbClr val="FFFFFF"/>
           </a:solidFill>
-          <a:ln w="12192">
+          <a:ln w="13716">
             <a:solidFill>
-              <a:srgbClr val="6F9BD1"/>
+              <a:srgbClr val="9DD3B8"/>
             </a:solidFill>
           </a:ln>
         </p:spPr>
         <p:txBody>
-          <a:bodyPr rtlCol="0" anchor="t" lIns="45720" tIns="461010" rIns="45720" bIns="0" wrap="none">
+          <a:bodyPr rtlCol="0" anchor="t" lIns="45720" tIns="441960" rIns="45720" bIns="0" wrap="none">
             <a:noAutofit/>
           </a:bodyPr>
           <a:lstStyle/>
           <a:p>
             <a:pPr algn="ctr">
               <a:lnSpc>
-                <a:spcPts val="1439"/>
+                <a:spcPts val="1560"/>
               </a:lnSpc>
             </a:pPr>
             <a:r>
-              <a:rPr sz="1140" b="1">
+              <a:rPr sz="1200" b="1">
                 <a:solidFill>
-                  <a:srgbClr val="0A2342"/>
+                  <a:srgbClr val="0B3D2E"/>
                 </a:solidFill>
                 <a:latin typeface="Pretendard"/>
                 <a:ea typeface="Pretendard"/>
@@ -12577,11 +12577,11 @@
           <a:p>
             <a:pPr algn="ctr">
               <a:lnSpc>
-                <a:spcPts val="1140"/>
+                <a:spcPts val="1320"/>
               </a:lnSpc>
             </a:pPr>
             <a:r>
-              <a:rPr sz="869" b="0">
+              <a:rPr sz="1019" b="0">
                 <a:solidFill>
                   <a:srgbClr val="3F4E61"/>
                 </a:solidFill>
@@ -12602,7 +12602,7 @@
         </p:nvSpPr>
         <p:spPr>
           <a:xfrm>
-            <a:off x="3931920" y="4979670"/>
+            <a:off x="3931920" y="4960620"/>
             <a:ext cx="259080" cy="228600"/>
           </a:xfrm>
           <a:custGeom>
@@ -13017,7 +13017,7 @@
             </a:pathLst>
           </a:custGeom>
           <a:solidFill>
-            <a:srgbClr val="164B8C"/>
+            <a:srgbClr val="1E6B4F"/>
           </a:solidFill>
           <a:ln>
             <a:noFill/>
@@ -13040,13 +13040,13 @@
         <p:spPr>
           <a:xfrm>
             <a:off x="3177540" y="4884420"/>
-            <a:ext cx="198120" cy="198120"/>
+            <a:ext cx="213360" cy="213360"/>
           </a:xfrm>
           <a:prstGeom prst="ellipse">
             <a:avLst/>
           </a:prstGeom>
           <a:solidFill>
-            <a:srgbClr val="164B8C"/>
+            <a:srgbClr val="1E6B4F"/>
           </a:solidFill>
           <a:ln>
             <a:noFill/>
@@ -13060,7 +13060,7 @@
           <a:p>
             <a:pPr algn="ctr"/>
             <a:r>
-              <a:rPr sz="900" b="1">
+              <a:rPr sz="1019" b="1">
                 <a:solidFill>
                   <a:srgbClr val="FFFFFF"/>
                 </a:solidFill>
@@ -13092,27 +13092,27 @@
           <a:solidFill>
             <a:srgbClr val="FFFFFF"/>
           </a:solidFill>
-          <a:ln w="12192">
+          <a:ln w="13716">
             <a:solidFill>
-              <a:srgbClr val="6F9BD1"/>
+              <a:srgbClr val="9DD3B8"/>
             </a:solidFill>
           </a:ln>
         </p:spPr>
         <p:txBody>
-          <a:bodyPr rtlCol="0" anchor="t" lIns="45720" tIns="461010" rIns="45720" bIns="0" wrap="none">
+          <a:bodyPr rtlCol="0" anchor="t" lIns="45720" tIns="441960" rIns="45720" bIns="0" wrap="none">
             <a:noAutofit/>
           </a:bodyPr>
           <a:lstStyle/>
           <a:p>
             <a:pPr algn="ctr">
               <a:lnSpc>
-                <a:spcPts val="1439"/>
+                <a:spcPts val="1560"/>
               </a:lnSpc>
             </a:pPr>
             <a:r>
-              <a:rPr sz="1140" b="1">
+              <a:rPr sz="1200" b="1">
                 <a:solidFill>
-                  <a:srgbClr val="0A2342"/>
+                  <a:srgbClr val="0B3D2E"/>
                 </a:solidFill>
                 <a:latin typeface="Pretendard"/>
                 <a:ea typeface="Pretendard"/>
@@ -13124,11 +13124,11 @@
           <a:p>
             <a:pPr algn="ctr">
               <a:lnSpc>
-                <a:spcPts val="1140"/>
+                <a:spcPts val="1320"/>
               </a:lnSpc>
             </a:pPr>
             <a:r>
-              <a:rPr sz="869" b="0">
+              <a:rPr sz="1019" b="0">
                 <a:solidFill>
                   <a:srgbClr val="3F4E61"/>
                 </a:solidFill>
@@ -13136,7 +13136,7 @@
                 <a:ea typeface="Pretendard"/>
                 <a:cs typeface="Pretendard"/>
               </a:rPr>
-              <a:t>마지막 반영 → 검증 → setval</a:t>
+              <a:t>반영 → 검증 → setval</a:t>
             </a:r>
           </a:p>
         </p:txBody>
@@ -13149,7 +13149,7 @@
         </p:nvSpPr>
         <p:spPr>
           <a:xfrm>
-            <a:off x="5969000" y="4992370"/>
+            <a:off x="5969000" y="4973320"/>
             <a:ext cx="254000" cy="203200"/>
           </a:xfrm>
           <a:custGeom>
@@ -13226,7 +13226,7 @@
             </a:pathLst>
           </a:custGeom>
           <a:solidFill>
-            <a:srgbClr val="164B8C"/>
+            <a:srgbClr val="1E6B4F"/>
           </a:solidFill>
           <a:ln>
             <a:noFill/>
@@ -13249,13 +13249,13 @@
         <p:spPr>
           <a:xfrm>
             <a:off x="5212080" y="4884420"/>
-            <a:ext cx="198120" cy="198120"/>
+            <a:ext cx="213360" cy="213360"/>
           </a:xfrm>
           <a:prstGeom prst="ellipse">
             <a:avLst/>
           </a:prstGeom>
           <a:solidFill>
-            <a:srgbClr val="164B8C"/>
+            <a:srgbClr val="1E6B4F"/>
           </a:solidFill>
           <a:ln>
             <a:noFill/>
@@ -13269,7 +13269,7 @@
           <a:p>
             <a:pPr algn="ctr"/>
             <a:r>
-              <a:rPr sz="900" b="1">
+              <a:rPr sz="1019" b="1">
                 <a:solidFill>
                   <a:srgbClr val="FFFFFF"/>
                 </a:solidFill>
@@ -13301,27 +13301,27 @@
           <a:solidFill>
             <a:srgbClr val="FFFFFF"/>
           </a:solidFill>
-          <a:ln w="12192">
+          <a:ln w="13716">
             <a:solidFill>
-              <a:srgbClr val="6F9BD1"/>
+              <a:srgbClr val="9DD3B8"/>
             </a:solidFill>
           </a:ln>
         </p:spPr>
         <p:txBody>
-          <a:bodyPr rtlCol="0" anchor="t" lIns="45720" tIns="461010" rIns="45720" bIns="0" wrap="none">
+          <a:bodyPr rtlCol="0" anchor="t" lIns="45720" tIns="441960" rIns="45720" bIns="0" wrap="none">
             <a:noAutofit/>
           </a:bodyPr>
           <a:lstStyle/>
           <a:p>
             <a:pPr algn="ctr">
               <a:lnSpc>
-                <a:spcPts val="1439"/>
+                <a:spcPts val="1560"/>
               </a:lnSpc>
             </a:pPr>
             <a:r>
-              <a:rPr sz="1140" b="1">
+              <a:rPr sz="1200" b="1">
                 <a:solidFill>
-                  <a:srgbClr val="0A2342"/>
+                  <a:srgbClr val="0B3D2E"/>
                 </a:solidFill>
                 <a:latin typeface="Pretendard"/>
                 <a:ea typeface="Pretendard"/>
@@ -13333,11 +13333,11 @@
           <a:p>
             <a:pPr algn="ctr">
               <a:lnSpc>
-                <a:spcPts val="1140"/>
+                <a:spcPts val="1320"/>
               </a:lnSpc>
             </a:pPr>
             <a:r>
-              <a:rPr sz="869" b="0">
+              <a:rPr sz="1019" b="0">
                 <a:solidFill>
                   <a:srgbClr val="3F4E61"/>
                 </a:solidFill>
@@ -13345,7 +13345,7 @@
                 <a:ea typeface="Pretendard"/>
                 <a:cs typeface="Pretendard"/>
               </a:rPr>
-              <a:t>작업 상태 기계 · 이어 하기</a:t>
+              <a:t>상태 기계 · 이어 하기</a:t>
             </a:r>
           </a:p>
         </p:txBody>
@@ -13358,7 +13358,7 @@
         </p:nvSpPr>
         <p:spPr>
           <a:xfrm>
-            <a:off x="8028940" y="4972685"/>
+            <a:off x="8028940" y="4953635"/>
             <a:ext cx="203518" cy="234950"/>
           </a:xfrm>
           <a:custGeom>
@@ -13990,7 +13990,7 @@
             </a:pathLst>
           </a:custGeom>
           <a:solidFill>
-            <a:srgbClr val="164B8C"/>
+            <a:srgbClr val="1E6B4F"/>
           </a:solidFill>
           <a:ln>
             <a:noFill/>
@@ -14013,13 +14013,13 @@
         <p:spPr>
           <a:xfrm>
             <a:off x="7246620" y="4884420"/>
-            <a:ext cx="198120" cy="198120"/>
+            <a:ext cx="213360" cy="213360"/>
           </a:xfrm>
           <a:prstGeom prst="ellipse">
             <a:avLst/>
           </a:prstGeom>
           <a:solidFill>
-            <a:srgbClr val="164B8C"/>
+            <a:srgbClr val="1E6B4F"/>
           </a:solidFill>
           <a:ln>
             <a:noFill/>
@@ -14033,7 +14033,7 @@
           <a:p>
             <a:pPr algn="ctr"/>
             <a:r>
-              <a:rPr sz="900" b="1">
+              <a:rPr sz="1019" b="1">
                 <a:solidFill>
                   <a:srgbClr val="FFFFFF"/>
                 </a:solidFill>
@@ -14065,27 +14065,27 @@
           <a:solidFill>
             <a:srgbClr val="FFFFFF"/>
           </a:solidFill>
-          <a:ln w="12192">
+          <a:ln w="13716">
             <a:solidFill>
-              <a:srgbClr val="6F9BD1"/>
+              <a:srgbClr val="9DD3B8"/>
             </a:solidFill>
           </a:ln>
         </p:spPr>
         <p:txBody>
-          <a:bodyPr rtlCol="0" anchor="t" lIns="45720" tIns="461010" rIns="45720" bIns="0" wrap="none">
+          <a:bodyPr rtlCol="0" anchor="t" lIns="45720" tIns="441960" rIns="45720" bIns="0" wrap="none">
             <a:noAutofit/>
           </a:bodyPr>
           <a:lstStyle/>
           <a:p>
             <a:pPr algn="ctr">
               <a:lnSpc>
-                <a:spcPts val="1439"/>
+                <a:spcPts val="1560"/>
               </a:lnSpc>
             </a:pPr>
             <a:r>
-              <a:rPr sz="1140" b="1">
+              <a:rPr sz="1200" b="1">
                 <a:solidFill>
-                  <a:srgbClr val="0A2342"/>
+                  <a:srgbClr val="0B3D2E"/>
                 </a:solidFill>
                 <a:latin typeface="Pretendard"/>
                 <a:ea typeface="Pretendard"/>
@@ -14097,11 +14097,11 @@
           <a:p>
             <a:pPr algn="ctr">
               <a:lnSpc>
-                <a:spcPts val="1140"/>
+                <a:spcPts val="1320"/>
               </a:lnSpc>
             </a:pPr>
             <a:r>
-              <a:rPr sz="869" b="0">
+              <a:rPr sz="1019" b="0">
                 <a:solidFill>
                   <a:srgbClr val="3F4E61"/>
                 </a:solidFill>
@@ -14122,7 +14122,7 @@
         </p:nvSpPr>
         <p:spPr>
           <a:xfrm>
-            <a:off x="1295400" y="2907030"/>
+            <a:off x="1295400" y="2887980"/>
             <a:ext cx="228600" cy="228600"/>
           </a:xfrm>
           <a:custGeom>
@@ -14521,7 +14521,7 @@
             </a:pathLst>
           </a:custGeom>
           <a:solidFill>
-            <a:srgbClr val="164B8C"/>
+            <a:srgbClr val="1E6B4F"/>
           </a:solidFill>
           <a:ln>
             <a:noFill/>
@@ -14554,27 +14554,27 @@
           <a:solidFill>
             <a:srgbClr val="FFFFFF"/>
           </a:solidFill>
-          <a:ln w="12192">
+          <a:ln w="13716">
             <a:solidFill>
-              <a:srgbClr val="6F9BD1"/>
+              <a:srgbClr val="9DD3B8"/>
             </a:solidFill>
           </a:ln>
         </p:spPr>
         <p:txBody>
-          <a:bodyPr rtlCol="0" anchor="t" lIns="45720" tIns="461010" rIns="45720" bIns="0" wrap="none">
+          <a:bodyPr rtlCol="0" anchor="t" lIns="45720" tIns="441960" rIns="45720" bIns="0" wrap="none">
             <a:noAutofit/>
           </a:bodyPr>
           <a:lstStyle/>
           <a:p>
             <a:pPr algn="ctr">
               <a:lnSpc>
-                <a:spcPts val="1439"/>
+                <a:spcPts val="1560"/>
               </a:lnSpc>
             </a:pPr>
             <a:r>
-              <a:rPr sz="1140" b="1">
+              <a:rPr sz="1200" b="1">
                 <a:solidFill>
-                  <a:srgbClr val="0A2342"/>
+                  <a:srgbClr val="0B3D2E"/>
                 </a:solidFill>
                 <a:latin typeface="Pretendard"/>
                 <a:ea typeface="Pretendard"/>
@@ -14586,11 +14586,11 @@
           <a:p>
             <a:pPr algn="ctr">
               <a:lnSpc>
-                <a:spcPts val="1140"/>
+                <a:spcPts val="1320"/>
               </a:lnSpc>
             </a:pPr>
             <a:r>
-              <a:rPr sz="869" b="0">
+              <a:rPr sz="1019" b="0">
                 <a:solidFill>
                   <a:srgbClr val="3F4E61"/>
                 </a:solidFill>
@@ -14611,7 +14611,7 @@
         </p:nvSpPr>
         <p:spPr>
           <a:xfrm>
-            <a:off x="1295400" y="3943350"/>
+            <a:off x="1295400" y="3924300"/>
             <a:ext cx="261302" cy="263525"/>
           </a:xfrm>
           <a:custGeom>
@@ -15978,7 +15978,7 @@
             </a:pathLst>
           </a:custGeom>
           <a:solidFill>
-            <a:srgbClr val="164B8C"/>
+            <a:srgbClr val="1E6B4F"/>
           </a:solidFill>
           <a:ln>
             <a:noFill/>
@@ -16011,27 +16011,27 @@
           <a:solidFill>
             <a:srgbClr val="FFFFFF"/>
           </a:solidFill>
-          <a:ln w="12192">
+          <a:ln w="13716">
             <a:solidFill>
-              <a:srgbClr val="6F9BD1"/>
+              <a:srgbClr val="9DD3B8"/>
             </a:solidFill>
           </a:ln>
         </p:spPr>
         <p:txBody>
-          <a:bodyPr rtlCol="0" anchor="t" lIns="45720" tIns="461010" rIns="45720" bIns="0" wrap="none">
+          <a:bodyPr rtlCol="0" anchor="t" lIns="45720" tIns="441960" rIns="45720" bIns="0" wrap="none">
             <a:noAutofit/>
           </a:bodyPr>
           <a:lstStyle/>
           <a:p>
             <a:pPr algn="ctr">
               <a:lnSpc>
-                <a:spcPts val="1439"/>
+                <a:spcPts val="1560"/>
               </a:lnSpc>
             </a:pPr>
             <a:r>
-              <a:rPr sz="1140" b="1">
+              <a:rPr sz="1200" b="1">
                 <a:solidFill>
-                  <a:srgbClr val="0A2342"/>
+                  <a:srgbClr val="0B3D2E"/>
                 </a:solidFill>
                 <a:latin typeface="Pretendard"/>
                 <a:ea typeface="Pretendard"/>
@@ -16043,11 +16043,11 @@
           <a:p>
             <a:pPr algn="ctr">
               <a:lnSpc>
-                <a:spcPts val="1140"/>
+                <a:spcPts val="1320"/>
               </a:lnSpc>
             </a:pPr>
             <a:r>
-              <a:rPr sz="869" b="0">
+              <a:rPr sz="1019" b="0">
                 <a:solidFill>
                   <a:srgbClr val="3F4E61"/>
                 </a:solidFill>
@@ -16068,7 +16068,7 @@
         </p:nvSpPr>
         <p:spPr>
           <a:xfrm>
-            <a:off x="1282700" y="4966970"/>
+            <a:off x="1282700" y="4947920"/>
             <a:ext cx="254000" cy="254000"/>
           </a:xfrm>
           <a:custGeom>
@@ -16977,7 +16977,7 @@
             </a:pathLst>
           </a:custGeom>
           <a:solidFill>
-            <a:srgbClr val="164B8C"/>
+            <a:srgbClr val="1E6B4F"/>
           </a:solidFill>
           <a:ln>
             <a:noFill/>
@@ -17010,27 +17010,27 @@
           <a:solidFill>
             <a:srgbClr val="FFFFFF"/>
           </a:solidFill>
-          <a:ln w="12192">
+          <a:ln w="13716">
             <a:solidFill>
-              <a:srgbClr val="6F9BD1"/>
+              <a:srgbClr val="9DD3B8"/>
             </a:solidFill>
           </a:ln>
         </p:spPr>
         <p:txBody>
-          <a:bodyPr rtlCol="0" anchor="t" lIns="45720" tIns="906780" rIns="45720" bIns="0" wrap="none">
+          <a:bodyPr rtlCol="0" anchor="t" lIns="45720" tIns="876300" rIns="45720" bIns="0" wrap="none">
             <a:noAutofit/>
           </a:bodyPr>
           <a:lstStyle/>
           <a:p>
             <a:pPr algn="ctr">
               <a:lnSpc>
-                <a:spcPts val="1439"/>
+                <a:spcPts val="1560"/>
               </a:lnSpc>
             </a:pPr>
             <a:r>
-              <a:rPr sz="1140" b="1">
+              <a:rPr sz="1200" b="1">
                 <a:solidFill>
-                  <a:srgbClr val="0A2342"/>
+                  <a:srgbClr val="0B3D2E"/>
                 </a:solidFill>
                 <a:latin typeface="Pretendard"/>
                 <a:ea typeface="Pretendard"/>
@@ -17042,11 +17042,11 @@
           <a:p>
             <a:pPr algn="ctr">
               <a:lnSpc>
-                <a:spcPts val="1140"/>
+                <a:spcPts val="1320"/>
               </a:lnSpc>
             </a:pPr>
             <a:r>
-              <a:rPr sz="869" b="0">
+              <a:rPr sz="1019" b="0">
                 <a:solidFill>
                   <a:srgbClr val="3F4E61"/>
                 </a:solidFill>
@@ -17060,11 +17060,11 @@
           <a:p>
             <a:pPr algn="ctr">
               <a:lnSpc>
-                <a:spcPts val="1140"/>
+                <a:spcPts val="1320"/>
               </a:lnSpc>
             </a:pPr>
             <a:r>
-              <a:rPr sz="869" b="0">
+              <a:rPr sz="1019" b="0">
                 <a:solidFill>
                   <a:srgbClr val="3F4E61"/>
                 </a:solidFill>
@@ -17085,7 +17085,7 @@
         </p:nvSpPr>
         <p:spPr>
           <a:xfrm>
-            <a:off x="10629900" y="3352800"/>
+            <a:off x="10629900" y="3322320"/>
             <a:ext cx="228600" cy="228600"/>
           </a:xfrm>
           <a:custGeom>
@@ -17484,7 +17484,7 @@
             </a:pathLst>
           </a:custGeom>
           <a:solidFill>
-            <a:srgbClr val="164B8C"/>
+            <a:srgbClr val="1E6B4F"/>
           </a:solidFill>
           <a:ln>
             <a:noFill/>
@@ -17507,37 +17507,37 @@
         <p:spPr>
           <a:xfrm>
             <a:off x="9829800" y="4831080"/>
-            <a:ext cx="1828800" cy="929640"/>
+            <a:ext cx="1828800" cy="1021080"/>
           </a:xfrm>
           <a:prstGeom prst="roundRect">
             <a:avLst>
-              <a:gd name="adj" fmla="val 9836"/>
+              <a:gd name="adj" fmla="val 8955"/>
             </a:avLst>
           </a:prstGeom>
           <a:solidFill>
             <a:srgbClr val="FFFFFF"/>
           </a:solidFill>
-          <a:ln w="12192">
+          <a:ln w="13716">
             <a:solidFill>
-              <a:srgbClr val="6F9BD1"/>
+              <a:srgbClr val="9DD3B8"/>
             </a:solidFill>
           </a:ln>
         </p:spPr>
         <p:txBody>
-          <a:bodyPr rtlCol="0" anchor="t" lIns="45720" tIns="388620" rIns="45720" bIns="0" wrap="none">
+          <a:bodyPr rtlCol="0" anchor="t" lIns="45720" tIns="403860" rIns="45720" bIns="0" wrap="none">
             <a:noAutofit/>
           </a:bodyPr>
           <a:lstStyle/>
           <a:p>
             <a:pPr algn="ctr">
               <a:lnSpc>
-                <a:spcPts val="1439"/>
+                <a:spcPts val="1560"/>
               </a:lnSpc>
             </a:pPr>
             <a:r>
-              <a:rPr sz="1140" b="1">
+              <a:rPr sz="1200" b="1">
                 <a:solidFill>
-                  <a:srgbClr val="0A2342"/>
+                  <a:srgbClr val="0B3D2E"/>
                 </a:solidFill>
                 <a:latin typeface="Pretendard"/>
                 <a:ea typeface="Pretendard"/>
@@ -17549,11 +17549,11 @@
           <a:p>
             <a:pPr algn="ctr">
               <a:lnSpc>
-                <a:spcPts val="1140"/>
+                <a:spcPts val="1320"/>
               </a:lnSpc>
             </a:pPr>
             <a:r>
-              <a:rPr sz="869" b="0">
+              <a:rPr sz="1019" b="0">
                 <a:solidFill>
                   <a:srgbClr val="3F4E61"/>
                 </a:solidFill>
@@ -17561,17 +17561,17 @@
                 <a:ea typeface="Pretendard"/>
                 <a:cs typeface="Pretendard"/>
               </a:rPr>
-              <a:t>job · watermark · 오프셋</a:t>
+              <a:t>job · 워터마크 · 오프셋</a:t>
             </a:r>
           </a:p>
           <a:p>
             <a:pPr algn="ctr">
               <a:lnSpc>
-                <a:spcPts val="1140"/>
+                <a:spcPts val="1320"/>
               </a:lnSpc>
             </a:pPr>
             <a:r>
-              <a:rPr sz="869" b="0">
+              <a:rPr sz="1019" b="0">
                 <a:solidFill>
                   <a:srgbClr val="3F4E61"/>
                 </a:solidFill>
@@ -17579,7 +17579,7 @@
                 <a:ea typeface="Pretendard"/>
                 <a:cs typeface="Pretendard"/>
               </a:rPr>
-              <a:t>change_log · verify_result</a:t>
+              <a:t>change_log · 검증 결과</a:t>
             </a:r>
           </a:p>
         </p:txBody>
@@ -17592,7 +17592,7 @@
         </p:nvSpPr>
         <p:spPr>
           <a:xfrm>
-            <a:off x="10629900" y="4907280"/>
+            <a:off x="10629900" y="4922520"/>
             <a:ext cx="228600" cy="228600"/>
           </a:xfrm>
           <a:custGeom>
@@ -19369,7 +19369,7 @@
             </a:pathLst>
           </a:custGeom>
           <a:solidFill>
-            <a:srgbClr val="164B8C"/>
+            <a:srgbClr val="1E6B4F"/>
           </a:solidFill>
           <a:ln>
             <a:noFill/>
@@ -19393,15 +19393,15 @@
         </p:nvCxnSpPr>
         <p:spPr>
           <a:xfrm>
-            <a:off x="4061460" y="1188720"/>
-            <a:ext cx="0" cy="701040"/>
+            <a:off x="4061460" y="1280160"/>
+            <a:ext cx="0" cy="609600"/>
           </a:xfrm>
           <a:prstGeom prst="line">
             <a:avLst/>
           </a:prstGeom>
           <a:ln w="16764">
             <a:solidFill>
-              <a:srgbClr val="164B8C"/>
+              <a:srgbClr val="1E6B4F"/>
             </a:solidFill>
             <a:tailEnd type="triangle" w="med" len="med"/>
           </a:ln>
@@ -19415,8 +19415,8 @@
         </p:nvSpPr>
         <p:spPr>
           <a:xfrm>
-            <a:off x="4107180" y="1315212"/>
-            <a:ext cx="912876" cy="167640"/>
+            <a:off x="4107180" y="1367790"/>
+            <a:ext cx="1088898" cy="190500"/>
           </a:xfrm>
           <a:prstGeom prst="rect">
             <a:avLst/>
@@ -19433,9 +19433,9 @@
           <a:p>
             <a:pPr algn="ctr"/>
             <a:r>
-              <a:rPr sz="840" b="1">
+              <a:rPr sz="1019" b="1">
                 <a:solidFill>
-                  <a:srgbClr val="164B8C"/>
+                  <a:srgbClr val="1E6B4F"/>
                 </a:solidFill>
                 <a:latin typeface="Pretendard"/>
                 <a:ea typeface="Pretendard"/>
@@ -19456,15 +19456,15 @@
         </p:nvCxnSpPr>
         <p:spPr>
           <a:xfrm>
-            <a:off x="6096000" y="1188720"/>
-            <a:ext cx="0" cy="701040"/>
+            <a:off x="6096000" y="1280160"/>
+            <a:ext cx="0" cy="609600"/>
           </a:xfrm>
           <a:prstGeom prst="line">
             <a:avLst/>
           </a:prstGeom>
           <a:ln w="16764">
             <a:solidFill>
-              <a:srgbClr val="164B8C"/>
+              <a:srgbClr val="1E6B4F"/>
             </a:solidFill>
             <a:tailEnd type="triangle" w="med" len="med"/>
           </a:ln>
@@ -19478,8 +19478,8 @@
         </p:nvSpPr>
         <p:spPr>
           <a:xfrm>
-            <a:off x="6141720" y="1315212"/>
-            <a:ext cx="576834" cy="167640"/>
+            <a:off x="6141720" y="1367790"/>
+            <a:ext cx="680847" cy="190500"/>
           </a:xfrm>
           <a:prstGeom prst="rect">
             <a:avLst/>
@@ -19496,9 +19496,9 @@
           <a:p>
             <a:pPr algn="ctr"/>
             <a:r>
-              <a:rPr sz="840" b="1">
+              <a:rPr sz="1019" b="1">
                 <a:solidFill>
-                  <a:srgbClr val="164B8C"/>
+                  <a:srgbClr val="1E6B4F"/>
                 </a:solidFill>
                 <a:latin typeface="Pretendard"/>
                 <a:ea typeface="Pretendard"/>
@@ -19528,7 +19528,7 @@
           </a:prstGeom>
           <a:ln w="16764">
             <a:solidFill>
-              <a:srgbClr val="164B8C"/>
+              <a:srgbClr val="1E6B4F"/>
             </a:solidFill>
             <a:tailEnd type="triangle" w="med" len="med"/>
           </a:ln>
@@ -19536,14 +19536,14 @@
       </p:cxnSp>
       <p:sp>
         <p:nvSpPr>
-          <p:cNvPr id="55" name="라벨 SNAPSHOT 읽기"/>
+          <p:cNvPr id="55" name="라벨 kdms 읽기"/>
           <p:cNvSpPr txBox="1"/>
           <p:nvPr/>
         </p:nvSpPr>
         <p:spPr>
           <a:xfrm>
-            <a:off x="2288667" y="3025140"/>
-            <a:ext cx="832866" cy="167640"/>
+            <a:off x="2351722" y="3002280"/>
+            <a:ext cx="706755" cy="190500"/>
           </a:xfrm>
           <a:prstGeom prst="rect">
             <a:avLst/>
@@ -19560,15 +19560,15 @@
           <a:p>
             <a:pPr algn="ctr"/>
             <a:r>
-              <a:rPr sz="840" b="1">
+              <a:rPr sz="1019" b="1">
                 <a:solidFill>
-                  <a:srgbClr val="164B8C"/>
+                  <a:srgbClr val="1E6B4F"/>
                 </a:solidFill>
                 <a:latin typeface="Pretendard"/>
                 <a:ea typeface="Pretendard"/>
                 <a:cs typeface="Pretendard"/>
               </a:rPr>
-              <a:t>SNAPSHOT 읽기</a:t>
+              <a:t>kdms 읽기</a:t>
             </a:r>
           </a:p>
         </p:txBody>
@@ -19592,7 +19592,7 @@
           </a:prstGeom>
           <a:ln w="16764">
             <a:solidFill>
-              <a:srgbClr val="164B8C"/>
+              <a:srgbClr val="1E6B4F"/>
             </a:solidFill>
             <a:tailEnd type="triangle" w="med" len="med"/>
           </a:ln>
@@ -19616,7 +19616,7 @@
           </a:prstGeom>
           <a:ln w="16764">
             <a:solidFill>
-              <a:srgbClr val="164B8C"/>
+              <a:srgbClr val="1E6B4F"/>
             </a:solidFill>
             <a:tailEnd type="triangle" w="med" len="med"/>
           </a:ln>
@@ -19630,8 +19630,8 @@
         </p:nvSpPr>
         <p:spPr>
           <a:xfrm>
-            <a:off x="9149715" y="3025140"/>
-            <a:ext cx="598170" cy="167640"/>
+            <a:off x="9095422" y="3002280"/>
+            <a:ext cx="706755" cy="190500"/>
           </a:xfrm>
           <a:prstGeom prst="rect">
             <a:avLst/>
@@ -19648,9 +19648,9 @@
           <a:p>
             <a:pPr algn="ctr"/>
             <a:r>
-              <a:rPr sz="840" b="1">
+              <a:rPr sz="1019" b="1">
                 <a:solidFill>
-                  <a:srgbClr val="164B8C"/>
+                  <a:srgbClr val="1E6B4F"/>
                 </a:solidFill>
                 <a:latin typeface="Pretendard"/>
                 <a:ea typeface="Pretendard"/>
@@ -19680,7 +19680,7 @@
           </a:prstGeom>
           <a:ln w="16764">
             <a:solidFill>
-              <a:srgbClr val="1F74C4"/>
+              <a:srgbClr val="2E9E6E"/>
             </a:solidFill>
             <a:prstDash val="dash"/>
             <a:tailEnd type="triangle" w="med" len="med"/>
@@ -19706,7 +19706,7 @@
           </a:prstGeom>
           <a:ln w="16764">
             <a:solidFill>
-              <a:srgbClr val="1F74C4"/>
+              <a:srgbClr val="2E9E6E"/>
             </a:solidFill>
             <a:prstDash val="dash"/>
             <a:tailEnd type="triangle" w="med" len="med"/>
@@ -19721,8 +19721,8 @@
         </p:nvSpPr>
         <p:spPr>
           <a:xfrm>
-            <a:off x="2416683" y="4061460"/>
-            <a:ext cx="576834" cy="167640"/>
+            <a:off x="2364676" y="4038600"/>
+            <a:ext cx="680847" cy="190500"/>
           </a:xfrm>
           <a:prstGeom prst="rect">
             <a:avLst/>
@@ -19739,9 +19739,9 @@
           <a:p>
             <a:pPr algn="ctr"/>
             <a:r>
-              <a:rPr sz="840" b="1">
+              <a:rPr sz="1019" b="1">
                 <a:solidFill>
-                  <a:srgbClr val="1F74C4"/>
+                  <a:srgbClr val="2E9E6E"/>
                 </a:solidFill>
                 <a:latin typeface="Pretendard"/>
                 <a:ea typeface="Pretendard"/>
@@ -19771,7 +19771,7 @@
           </a:prstGeom>
           <a:ln w="16764">
             <a:solidFill>
-              <a:srgbClr val="1F74C4"/>
+              <a:srgbClr val="2E9E6E"/>
             </a:solidFill>
             <a:prstDash val="dash"/>
             <a:tailEnd type="triangle" w="med" len="med"/>
@@ -19797,7 +19797,7 @@
           </a:prstGeom>
           <a:ln w="16764">
             <a:solidFill>
-              <a:srgbClr val="1F74C4"/>
+              <a:srgbClr val="2E9E6E"/>
             </a:solidFill>
             <a:prstDash val="dash"/>
             <a:tailEnd type="triangle" w="med" len="med"/>
@@ -19822,7 +19822,7 @@
           </a:prstGeom>
           <a:ln w="16764">
             <a:solidFill>
-              <a:srgbClr val="1F74C4"/>
+              <a:srgbClr val="2E9E6E"/>
             </a:solidFill>
             <a:prstDash val="dash"/>
             <a:tailEnd type="triangle" w="med" len="med"/>
@@ -19837,8 +19837,8 @@
         </p:nvSpPr>
         <p:spPr>
           <a:xfrm>
-            <a:off x="9160383" y="4061460"/>
-            <a:ext cx="576834" cy="167640"/>
+            <a:off x="9108376" y="4038600"/>
+            <a:ext cx="680847" cy="190500"/>
           </a:xfrm>
           <a:prstGeom prst="rect">
             <a:avLst/>
@@ -19855,9 +19855,9 @@
           <a:p>
             <a:pPr algn="ctr"/>
             <a:r>
-              <a:rPr sz="840" b="1">
+              <a:rPr sz="1019" b="1">
                 <a:solidFill>
-                  <a:srgbClr val="1F74C4"/>
+                  <a:srgbClr val="2E9E6E"/>
                 </a:solidFill>
                 <a:latin typeface="Pretendard"/>
                 <a:ea typeface="Pretendard"/>
@@ -19880,14 +19880,14 @@
         <p:spPr>
           <a:xfrm>
             <a:off x="9067800" y="5295900"/>
-            <a:ext cx="762000" cy="0"/>
+            <a:ext cx="762000" cy="45720"/>
           </a:xfrm>
-          <a:prstGeom prst="line">
+          <a:prstGeom prst="bentConnector3">
             <a:avLst/>
           </a:prstGeom>
           <a:ln w="16764">
             <a:solidFill>
-              <a:srgbClr val="164B8C"/>
+              <a:srgbClr val="1E6B4F"/>
             </a:solidFill>
             <a:tailEnd type="triangle" w="med" len="med"/>
           </a:ln>
@@ -19901,8 +19901,8 @@
         </p:nvSpPr>
         <p:spPr>
           <a:xfrm>
-            <a:off x="9160383" y="5097780"/>
-            <a:ext cx="576834" cy="167640"/>
+            <a:off x="8917876" y="5074920"/>
+            <a:ext cx="680847" cy="190500"/>
           </a:xfrm>
           <a:prstGeom prst="rect">
             <a:avLst/>
@@ -19919,9 +19919,9 @@
           <a:p>
             <a:pPr algn="ctr"/>
             <a:r>
-              <a:rPr sz="840" b="1">
+              <a:rPr sz="1019" b="1">
                 <a:solidFill>
-                  <a:srgbClr val="164B8C"/>
+                  <a:srgbClr val="1E6B4F"/>
                 </a:solidFill>
                 <a:latin typeface="Pretendard"/>
                 <a:ea typeface="Pretendard"/>
@@ -19941,7 +19941,7 @@
         <p:spPr>
           <a:xfrm>
             <a:off x="381000" y="6309360"/>
-            <a:ext cx="3442335" cy="396240"/>
+            <a:ext cx="3665601" cy="396240"/>
           </a:xfrm>
           <a:prstGeom prst="roundRect">
             <a:avLst>
@@ -19953,7 +19953,7 @@
           </a:solidFill>
           <a:ln w="10668">
             <a:solidFill>
-              <a:srgbClr val="A9C3E2"/>
+              <a:srgbClr val="9DD3B8"/>
             </a:solidFill>
           </a:ln>
         </p:spPr>
@@ -19989,9 +19989,9 @@
           <a:p>
             <a:pPr algn="l"/>
             <a:r>
-              <a:rPr sz="900" b="1">
+              <a:rPr sz="1019" b="1">
                 <a:solidFill>
-                  <a:srgbClr val="0A2342"/>
+                  <a:srgbClr val="0B3D2E"/>
                 </a:solidFill>
                 <a:latin typeface="Pretendard"/>
                 <a:ea typeface="Pretendard"/>
@@ -20018,7 +20018,7 @@
           </a:prstGeom>
           <a:ln w="16764">
             <a:solidFill>
-              <a:srgbClr val="164B8C"/>
+              <a:srgbClr val="1E6B4F"/>
             </a:solidFill>
             <a:tailEnd type="triangle" w="med" len="med"/>
           </a:ln>
@@ -20033,7 +20033,7 @@
         <p:spPr>
           <a:xfrm>
             <a:off x="1341120" y="6309360"/>
-            <a:ext cx="786765" cy="396240"/>
+            <a:ext cx="871347" cy="396240"/>
           </a:xfrm>
           <a:prstGeom prst="rect">
             <a:avLst/>
@@ -20048,7 +20048,7 @@
           <a:p>
             <a:pPr algn="l"/>
             <a:r>
-              <a:rPr sz="900" b="1">
+              <a:rPr sz="1019" b="1">
                 <a:solidFill>
                   <a:srgbClr val="16202C"/>
                 </a:solidFill>
@@ -20069,7 +20069,7 @@
         </p:nvCxnSpPr>
         <p:spPr>
           <a:xfrm>
-            <a:off x="2204085" y="6507480"/>
+            <a:off x="2288667" y="6507480"/>
             <a:ext cx="350520" cy="0"/>
           </a:xfrm>
           <a:prstGeom prst="line">
@@ -20077,7 +20077,7 @@
           </a:prstGeom>
           <a:ln w="16764">
             <a:solidFill>
-              <a:srgbClr val="1F74C4"/>
+              <a:srgbClr val="2E9E6E"/>
             </a:solidFill>
             <a:prstDash val="dash"/>
             <a:tailEnd type="triangle" w="med" len="med"/>
@@ -20092,8 +20092,8 @@
         </p:nvSpPr>
         <p:spPr>
           <a:xfrm>
-            <a:off x="2630805" y="6309360"/>
-            <a:ext cx="1192530" cy="396240"/>
+            <a:off x="2715387" y="6309360"/>
+            <a:ext cx="1331214" cy="396240"/>
           </a:xfrm>
           <a:prstGeom prst="rect">
             <a:avLst/>
@@ -20108,7 +20108,7 @@
           <a:p>
             <a:pPr algn="l"/>
             <a:r>
-              <a:rPr sz="900" b="1">
+              <a:rPr sz="1019" b="1">
                 <a:solidFill>
                   <a:srgbClr val="16202C"/>
                 </a:solidFill>
@@ -20129,8 +20129,8 @@
         </p:nvSpPr>
         <p:spPr>
           <a:xfrm>
-            <a:off x="6929628" y="6385560"/>
-            <a:ext cx="4881372" cy="167640"/>
+            <a:off x="5948934" y="6347460"/>
+            <a:ext cx="5862066" cy="190500"/>
           </a:xfrm>
           <a:prstGeom prst="rect">
             <a:avLst/>
@@ -20145,7 +20145,7 @@
           <a:p>
             <a:pPr algn="r"/>
             <a:r>
-              <a:rPr sz="840" b="0">
+              <a:rPr sz="1019" b="0">
                 <a:solidFill>
                   <a:srgbClr val="3F4E61"/>
                 </a:solidFill>
@@ -20166,8 +20166,8 @@
         </p:nvSpPr>
         <p:spPr>
           <a:xfrm>
-            <a:off x="5878830" y="6553200"/>
-            <a:ext cx="5932170" cy="167640"/>
+            <a:off x="4672965" y="6537960"/>
+            <a:ext cx="7138035" cy="190500"/>
           </a:xfrm>
           <a:prstGeom prst="rect">
             <a:avLst/>
@@ -20182,7 +20182,7 @@
           <a:p>
             <a:pPr algn="r"/>
             <a:r>
-              <a:rPr sz="840" b="0">
+              <a:rPr sz="1019" b="0">
                 <a:solidFill>
                   <a:srgbClr val="3F4E61"/>
                 </a:solidFill>
